--- a/MeetingPPTs/Bus-based Fabric_18_02_26.pptx
+++ b/MeetingPPTs/Bus-based Fabric_18_02_26.pptx
@@ -5,7 +5,7 @@
     <p:sldMasterId id="2147483648" r:id="rId1"/>
   </p:sldMasterIdLst>
   <p:notesMasterIdLst>
-    <p:notesMasterId r:id="rId9"/>
+    <p:notesMasterId r:id="rId10"/>
   </p:notesMasterIdLst>
   <p:sldIdLst>
     <p:sldId id="262" r:id="rId2"/>
@@ -15,6 +15,7 @@
     <p:sldId id="257" r:id="rId6"/>
     <p:sldId id="259" r:id="rId7"/>
     <p:sldId id="256" r:id="rId8"/>
+    <p:sldId id="263" r:id="rId9"/>
   </p:sldIdLst>
   <p:sldSz cx="12192000" cy="6858000"/>
   <p:notesSz cx="6858000" cy="9144000"/>
@@ -124,7 +125,7 @@
 <file path=ppt/revisionInfo.xml><?xml version="1.0" encoding="utf-8"?>
 <p1510:revInfo xmlns:a="http://schemas.openxmlformats.org/drawingml/2006/main" xmlns:r="http://schemas.openxmlformats.org/officeDocument/2006/relationships" xmlns:p1510="http://schemas.microsoft.com/office/powerpoint/2015/10/main">
   <p1510:revLst>
-    <p1510:client id="{B76315FD-A8B1-40C0-88BF-57F339EC5A36}" v="1" dt="2026-02-19T03:53:19.761"/>
+    <p1510:client id="{B76315FD-A8B1-40C0-88BF-57F339EC5A36}" v="5" dt="2026-03-11T17:29:08.958"/>
   </p1510:revLst>
 </p1510:revInfo>
 </file>
@@ -211,7 +212,7 @@
           <a:p>
             <a:fld id="{D8D88862-0398-42F6-99D2-BF1DBE77D5CE}" type="datetimeFigureOut">
               <a:rPr lang="en-US" smtClean="0"/>
-              <a:t>2/19/2026</a:t>
+              <a:t>3/11/2026</a:t>
             </a:fld>
             <a:endParaRPr lang="en-US"/>
           </a:p>
@@ -522,7 +523,7 @@
           <a:bodyPr/>
           <a:lstStyle/>
           <a:p>
-            <a:endParaRPr lang="en-IN" dirty="0"/>
+            <a:endParaRPr lang="en-IN"/>
           </a:p>
         </p:txBody>
       </p:sp>
@@ -624,7 +625,7 @@
           <a:bodyPr/>
           <a:lstStyle/>
           <a:p>
-            <a:endParaRPr lang="en-IN" dirty="0"/>
+            <a:endParaRPr lang="en-IN"/>
           </a:p>
         </p:txBody>
       </p:sp>
@@ -817,7 +818,7 @@
           <a:p>
             <a:fld id="{4210A85F-93D0-4F6A-90CF-363D846DF318}" type="datetimeFigureOut">
               <a:rPr lang="en-US" smtClean="0"/>
-              <a:t>2/19/2026</a:t>
+              <a:t>3/11/2026</a:t>
             </a:fld>
             <a:endParaRPr lang="en-US"/>
           </a:p>
@@ -1015,7 +1016,7 @@
           <a:p>
             <a:fld id="{4210A85F-93D0-4F6A-90CF-363D846DF318}" type="datetimeFigureOut">
               <a:rPr lang="en-US" smtClean="0"/>
-              <a:t>2/19/2026</a:t>
+              <a:t>3/11/2026</a:t>
             </a:fld>
             <a:endParaRPr lang="en-US"/>
           </a:p>
@@ -1223,7 +1224,7 @@
           <a:p>
             <a:fld id="{4210A85F-93D0-4F6A-90CF-363D846DF318}" type="datetimeFigureOut">
               <a:rPr lang="en-US" smtClean="0"/>
-              <a:t>2/19/2026</a:t>
+              <a:t>3/11/2026</a:t>
             </a:fld>
             <a:endParaRPr lang="en-US"/>
           </a:p>
@@ -1421,7 +1422,7 @@
           <a:p>
             <a:fld id="{4210A85F-93D0-4F6A-90CF-363D846DF318}" type="datetimeFigureOut">
               <a:rPr lang="en-US" smtClean="0"/>
-              <a:t>2/19/2026</a:t>
+              <a:t>3/11/2026</a:t>
             </a:fld>
             <a:endParaRPr lang="en-US"/>
           </a:p>
@@ -1696,7 +1697,7 @@
           <a:p>
             <a:fld id="{4210A85F-93D0-4F6A-90CF-363D846DF318}" type="datetimeFigureOut">
               <a:rPr lang="en-US" smtClean="0"/>
-              <a:t>2/19/2026</a:t>
+              <a:t>3/11/2026</a:t>
             </a:fld>
             <a:endParaRPr lang="en-US"/>
           </a:p>
@@ -1961,7 +1962,7 @@
           <a:p>
             <a:fld id="{4210A85F-93D0-4F6A-90CF-363D846DF318}" type="datetimeFigureOut">
               <a:rPr lang="en-US" smtClean="0"/>
-              <a:t>2/19/2026</a:t>
+              <a:t>3/11/2026</a:t>
             </a:fld>
             <a:endParaRPr lang="en-US"/>
           </a:p>
@@ -2373,7 +2374,7 @@
           <a:p>
             <a:fld id="{4210A85F-93D0-4F6A-90CF-363D846DF318}" type="datetimeFigureOut">
               <a:rPr lang="en-US" smtClean="0"/>
-              <a:t>2/19/2026</a:t>
+              <a:t>3/11/2026</a:t>
             </a:fld>
             <a:endParaRPr lang="en-US"/>
           </a:p>
@@ -2514,7 +2515,7 @@
           <a:p>
             <a:fld id="{4210A85F-93D0-4F6A-90CF-363D846DF318}" type="datetimeFigureOut">
               <a:rPr lang="en-US" smtClean="0"/>
-              <a:t>2/19/2026</a:t>
+              <a:t>3/11/2026</a:t>
             </a:fld>
             <a:endParaRPr lang="en-US"/>
           </a:p>
@@ -2627,7 +2628,7 @@
           <a:p>
             <a:fld id="{4210A85F-93D0-4F6A-90CF-363D846DF318}" type="datetimeFigureOut">
               <a:rPr lang="en-US" smtClean="0"/>
-              <a:t>2/19/2026</a:t>
+              <a:t>3/11/2026</a:t>
             </a:fld>
             <a:endParaRPr lang="en-US"/>
           </a:p>
@@ -2938,7 +2939,7 @@
           <a:p>
             <a:fld id="{4210A85F-93D0-4F6A-90CF-363D846DF318}" type="datetimeFigureOut">
               <a:rPr lang="en-US" smtClean="0"/>
-              <a:t>2/19/2026</a:t>
+              <a:t>3/11/2026</a:t>
             </a:fld>
             <a:endParaRPr lang="en-US"/>
           </a:p>
@@ -3226,7 +3227,7 @@
           <a:p>
             <a:fld id="{4210A85F-93D0-4F6A-90CF-363D846DF318}" type="datetimeFigureOut">
               <a:rPr lang="en-US" smtClean="0"/>
-              <a:t>2/19/2026</a:t>
+              <a:t>3/11/2026</a:t>
             </a:fld>
             <a:endParaRPr lang="en-US"/>
           </a:p>
@@ -3467,7 +3468,7 @@
           <a:p>
             <a:fld id="{4210A85F-93D0-4F6A-90CF-363D846DF318}" type="datetimeFigureOut">
               <a:rPr lang="en-US" smtClean="0"/>
-              <a:t>2/19/2026</a:t>
+              <a:t>3/11/2026</a:t>
             </a:fld>
             <a:endParaRPr lang="en-US"/>
           </a:p>
@@ -3906,7 +3907,7 @@
           <a:lstStyle/>
           <a:p>
             <a:r>
-              <a:rPr lang="en-US" dirty="0"/>
+              <a:rPr lang="en-US"/>
               <a:t>Bus-based Fabric</a:t>
             </a:r>
           </a:p>
@@ -3934,13 +3935,13 @@
           <a:lstStyle/>
           <a:p>
             <a:r>
-              <a:rPr lang="en-US" dirty="0"/>
+              <a:rPr lang="en-US"/>
               <a:t>Anuparna Ganguly</a:t>
             </a:r>
           </a:p>
           <a:p>
             <a:r>
-              <a:rPr lang="en-US" b="1" dirty="0">
+              <a:rPr lang="en-US" b="1">
                 <a:solidFill>
                   <a:srgbClr val="00B050"/>
                 </a:solidFill>
@@ -4013,7 +4014,7 @@
               <a:buChar char="•"/>
             </a:pPr>
             <a:r>
-              <a:rPr lang="en-US" dirty="0"/>
+              <a:rPr lang="en-US"/>
               <a:t>Buffer size = 12</a:t>
             </a:r>
           </a:p>
@@ -4023,7 +4024,7 @@
               <a:buChar char="•"/>
             </a:pPr>
             <a:r>
-              <a:rPr lang="en-US" dirty="0"/>
+              <a:rPr lang="en-US"/>
               <a:t>IP6 is inactive and doesn’t send any packets into the fabric</a:t>
             </a:r>
           </a:p>
@@ -4058,11 +4059,11 @@
           <a:lstStyle/>
           <a:p>
             <a:r>
-              <a:rPr lang="en-US" sz="3200" b="1" dirty="0"/>
+              <a:rPr lang="en-US" sz="3200" b="1"/>
               <a:t>Experiment 1 : </a:t>
             </a:r>
             <a:r>
-              <a:rPr lang="en-US" sz="3200" b="1" dirty="0">
+              <a:rPr lang="en-US" sz="3200" b="1">
                 <a:solidFill>
                   <a:srgbClr val="00B050"/>
                 </a:solidFill>
@@ -4070,11 +4071,11 @@
               <a:t>IP0-&gt;BF0-&gt;DIE0</a:t>
             </a:r>
             <a:r>
-              <a:rPr lang="en-US" sz="3200" dirty="0"/>
+              <a:rPr lang="en-US" sz="3200"/>
               <a:t>; </a:t>
             </a:r>
             <a:r>
-              <a:rPr lang="en-US" sz="3200" dirty="0">
+              <a:rPr lang="en-US" sz="3200">
                 <a:solidFill>
                   <a:srgbClr val="FF0000"/>
                 </a:solidFill>
@@ -4083,7 +4084,7 @@
             </a:r>
           </a:p>
           <a:p>
-            <a:endParaRPr lang="en-IN" sz="3200" b="1" dirty="0"/>
+            <a:endParaRPr lang="en-IN" sz="3200" b="1"/>
           </a:p>
         </p:txBody>
       </p:sp>
@@ -4314,7 +4315,7 @@
           <a:lstStyle/>
           <a:p>
             <a:r>
-              <a:rPr lang="en-IN" sz="2000" b="1" dirty="0">
+              <a:rPr lang="en-IN" sz="2000" b="1">
                 <a:solidFill>
                   <a:srgbClr val="FF0000"/>
                 </a:solidFill>
@@ -4322,7 +4323,7 @@
               <a:t>o/p from </a:t>
             </a:r>
             <a:r>
-              <a:rPr lang="en-IN" sz="2000" b="1" dirty="0" err="1">
+              <a:rPr lang="en-IN" sz="2000" b="1" err="1">
                 <a:solidFill>
                   <a:srgbClr val="FF0000"/>
                 </a:solidFill>
@@ -4330,14 +4331,14 @@
               <a:t>FlexNoC</a:t>
             </a:r>
             <a:r>
-              <a:rPr lang="en-IN" sz="2000" b="1" dirty="0">
+              <a:rPr lang="en-IN" sz="2000" b="1">
                 <a:solidFill>
                   <a:srgbClr val="FF0000"/>
                 </a:solidFill>
               </a:rPr>
               <a:t> </a:t>
             </a:r>
-            <a:endParaRPr lang="en-IN" sz="1400" b="1" dirty="0">
+            <a:endParaRPr lang="en-IN" sz="1400" b="1">
               <a:solidFill>
                 <a:srgbClr val="FF0000"/>
               </a:solidFill>
@@ -4389,8 +4390,8 @@
         </p:nvSpPr>
         <p:spPr>
           <a:xfrm>
-            <a:off x="8785477" y="5489206"/>
-            <a:ext cx="2513060" cy="523220"/>
+            <a:off x="7895303" y="5489206"/>
+            <a:ext cx="3403234" cy="369332"/>
           </a:xfrm>
           <a:prstGeom prst="rect">
             <a:avLst/>
@@ -4404,26 +4405,13 @@
           <a:lstStyle/>
           <a:p>
             <a:r>
-              <a:rPr lang="en-IN" dirty="0">
+              <a:rPr lang="en-IN" b="1" dirty="0">
                 <a:solidFill>
                   <a:srgbClr val="FF0000"/>
                 </a:solidFill>
               </a:rPr>
-              <a:t>.</a:t>
-            </a:r>
-            <a:r>
-              <a:rPr lang="en-IN" sz="2800" b="1" dirty="0">
-                <a:solidFill>
-                  <a:srgbClr val="FF0000"/>
-                </a:solidFill>
-              </a:rPr>
-              <a:t>dot input file </a:t>
-            </a:r>
-            <a:endParaRPr lang="en-IN" b="1" dirty="0">
-              <a:solidFill>
-                <a:srgbClr val="FF0000"/>
-              </a:solidFill>
-            </a:endParaRPr>
+              <a:t>../test/busFabricExp1.dot</a:t>
+            </a:r>
           </a:p>
         </p:txBody>
       </p:sp>
@@ -4492,7 +4480,7 @@
           <a:lstStyle/>
           <a:p>
             <a:r>
-              <a:rPr lang="en-IN" sz="2000" b="1" dirty="0">
+              <a:rPr lang="en-IN" sz="2000" b="1">
                 <a:solidFill>
                   <a:srgbClr val="FF0000"/>
                 </a:solidFill>
@@ -4500,7 +4488,7 @@
               <a:t>Autogenerated </a:t>
             </a:r>
             <a:r>
-              <a:rPr lang="en-IN" sz="2000" b="1" dirty="0" err="1">
+              <a:rPr lang="en-IN" sz="2000" b="1" err="1">
                 <a:solidFill>
                   <a:srgbClr val="FF0000"/>
                 </a:solidFill>
@@ -4508,14 +4496,14 @@
               <a:t>png</a:t>
             </a:r>
             <a:r>
-              <a:rPr lang="en-IN" sz="2000" b="1" dirty="0">
+              <a:rPr lang="en-IN" sz="2000" b="1">
                 <a:solidFill>
                   <a:srgbClr val="FF0000"/>
                 </a:solidFill>
               </a:rPr>
               <a:t> file </a:t>
             </a:r>
-            <a:endParaRPr lang="en-IN" sz="1400" b="1" dirty="0">
+            <a:endParaRPr lang="en-IN" sz="1400" b="1">
               <a:solidFill>
                 <a:srgbClr val="FF0000"/>
               </a:solidFill>
@@ -4623,7 +4611,7 @@
               <a:buChar char="•"/>
             </a:pPr>
             <a:r>
-              <a:rPr lang="en-US" dirty="0"/>
+              <a:rPr lang="en-US"/>
               <a:t>Buffer size = 12</a:t>
             </a:r>
           </a:p>
@@ -4633,7 +4621,7 @@
               <a:buChar char="•"/>
             </a:pPr>
             <a:r>
-              <a:rPr lang="en-US" dirty="0"/>
+              <a:rPr lang="en-US"/>
               <a:t>IP0 is inactive and doesn’t send any packets into the fabric</a:t>
             </a:r>
           </a:p>
@@ -4668,11 +4656,11 @@
           <a:lstStyle/>
           <a:p>
             <a:r>
-              <a:rPr lang="en-US" sz="3200" b="1" dirty="0"/>
+              <a:rPr lang="en-US" sz="3200" b="1"/>
               <a:t>Experiment 2 : </a:t>
             </a:r>
             <a:r>
-              <a:rPr lang="en-US" sz="3200" b="1" dirty="0">
+              <a:rPr lang="en-US" sz="3200" b="1">
                 <a:solidFill>
                   <a:srgbClr val="00B050"/>
                 </a:solidFill>
@@ -4680,11 +4668,11 @@
               <a:t>IP6-&gt;BF6-&gt;BF0-&gt;DIE0</a:t>
             </a:r>
             <a:r>
-              <a:rPr lang="en-US" sz="3200" dirty="0"/>
+              <a:rPr lang="en-US" sz="3200"/>
               <a:t>; </a:t>
             </a:r>
             <a:r>
-              <a:rPr lang="en-US" sz="3200" b="1" dirty="0">
+              <a:rPr lang="en-US" sz="3200" b="1">
                 <a:solidFill>
                   <a:srgbClr val="FF0000"/>
                 </a:solidFill>
@@ -4693,14 +4681,14 @@
             </a:r>
           </a:p>
           <a:p>
-            <a:endParaRPr lang="en-US" sz="3200" dirty="0">
+            <a:endParaRPr lang="en-US" sz="3200">
               <a:solidFill>
                 <a:srgbClr val="FF0000"/>
               </a:solidFill>
             </a:endParaRPr>
           </a:p>
           <a:p>
-            <a:endParaRPr lang="en-IN" sz="3200" b="1" dirty="0"/>
+            <a:endParaRPr lang="en-IN" sz="3200" b="1"/>
           </a:p>
         </p:txBody>
       </p:sp>
@@ -4931,7 +4919,7 @@
           <a:lstStyle/>
           <a:p>
             <a:r>
-              <a:rPr lang="en-IN" sz="2000" b="1" dirty="0">
+              <a:rPr lang="en-IN" sz="2000" b="1">
                 <a:solidFill>
                   <a:srgbClr val="FF0000"/>
                 </a:solidFill>
@@ -4939,7 +4927,7 @@
               <a:t>o/p from </a:t>
             </a:r>
             <a:r>
-              <a:rPr lang="en-IN" sz="2000" b="1" dirty="0" err="1">
+              <a:rPr lang="en-IN" sz="2000" b="1" err="1">
                 <a:solidFill>
                   <a:srgbClr val="FF0000"/>
                 </a:solidFill>
@@ -4947,14 +4935,14 @@
               <a:t>FlexNoC</a:t>
             </a:r>
             <a:r>
-              <a:rPr lang="en-IN" sz="2000" b="1" dirty="0">
+              <a:rPr lang="en-IN" sz="2000" b="1">
                 <a:solidFill>
                   <a:srgbClr val="FF0000"/>
                 </a:solidFill>
               </a:rPr>
               <a:t> </a:t>
             </a:r>
-            <a:endParaRPr lang="en-IN" sz="1400" b="1" dirty="0">
+            <a:endParaRPr lang="en-IN" sz="1400" b="1">
               <a:solidFill>
                 <a:srgbClr val="FF0000"/>
               </a:solidFill>
@@ -4992,58 +4980,6 @@
           </a:prstGeom>
         </p:spPr>
       </p:pic>
-      <p:sp>
-        <p:nvSpPr>
-          <p:cNvPr id="7" name="TextBox 6">
-            <a:extLst>
-              <a:ext uri="{FF2B5EF4-FFF2-40B4-BE49-F238E27FC236}">
-                <a16:creationId xmlns:a16="http://schemas.microsoft.com/office/drawing/2014/main" id="{D10DA647-F5DA-298F-43DF-3F99A846DB57}"/>
-              </a:ext>
-            </a:extLst>
-          </p:cNvPr>
-          <p:cNvSpPr txBox="1"/>
-          <p:nvPr/>
-        </p:nvSpPr>
-        <p:spPr>
-          <a:xfrm>
-            <a:off x="8872695" y="5508439"/>
-            <a:ext cx="2513060" cy="523220"/>
-          </a:xfrm>
-          <a:prstGeom prst="rect">
-            <a:avLst/>
-          </a:prstGeom>
-          <a:noFill/>
-        </p:spPr>
-        <p:txBody>
-          <a:bodyPr wrap="square" rtlCol="0">
-            <a:spAutoFit/>
-          </a:bodyPr>
-          <a:lstStyle/>
-          <a:p>
-            <a:r>
-              <a:rPr lang="en-IN" dirty="0">
-                <a:solidFill>
-                  <a:srgbClr val="FF0000"/>
-                </a:solidFill>
-              </a:rPr>
-              <a:t>.</a:t>
-            </a:r>
-            <a:r>
-              <a:rPr lang="en-IN" sz="2800" b="1" dirty="0">
-                <a:solidFill>
-                  <a:srgbClr val="FF0000"/>
-                </a:solidFill>
-              </a:rPr>
-              <a:t>dot input file </a:t>
-            </a:r>
-            <a:endParaRPr lang="en-IN" b="1" dirty="0">
-              <a:solidFill>
-                <a:srgbClr val="FF0000"/>
-              </a:solidFill>
-            </a:endParaRPr>
-          </a:p>
-        </p:txBody>
-      </p:sp>
       <p:pic>
         <p:nvPicPr>
           <p:cNvPr id="23" name="Picture 22">
@@ -5109,7 +5045,7 @@
           <a:lstStyle/>
           <a:p>
             <a:r>
-              <a:rPr lang="en-IN" sz="2000" b="1" dirty="0">
+              <a:rPr lang="en-IN" sz="2000" b="1">
                 <a:solidFill>
                   <a:srgbClr val="FF0000"/>
                 </a:solidFill>
@@ -5117,7 +5053,7 @@
               <a:t>Autogenerated </a:t>
             </a:r>
             <a:r>
-              <a:rPr lang="en-IN" sz="2000" b="1" dirty="0" err="1">
+              <a:rPr lang="en-IN" sz="2000" b="1" err="1">
                 <a:solidFill>
                   <a:srgbClr val="FF0000"/>
                 </a:solidFill>
@@ -5125,14 +5061,14 @@
               <a:t>png</a:t>
             </a:r>
             <a:r>
-              <a:rPr lang="en-IN" sz="2000" b="1" dirty="0">
+              <a:rPr lang="en-IN" sz="2000" b="1">
                 <a:solidFill>
                   <a:srgbClr val="FF0000"/>
                 </a:solidFill>
               </a:rPr>
               <a:t> file </a:t>
             </a:r>
-            <a:endParaRPr lang="en-IN" sz="1400" b="1" dirty="0">
+            <a:endParaRPr lang="en-IN" sz="1400" b="1">
               <a:solidFill>
                 <a:srgbClr val="FF0000"/>
               </a:solidFill>
@@ -5170,6 +5106,45 @@
           </a:prstGeom>
         </p:spPr>
       </p:pic>
+      <p:sp>
+        <p:nvSpPr>
+          <p:cNvPr id="2" name="TextBox 1">
+            <a:extLst>
+              <a:ext uri="{FF2B5EF4-FFF2-40B4-BE49-F238E27FC236}">
+                <a16:creationId xmlns:a16="http://schemas.microsoft.com/office/drawing/2014/main" id="{3D3CB553-78E5-DCB9-DEA5-FF93204579A5}"/>
+              </a:ext>
+            </a:extLst>
+          </p:cNvPr>
+          <p:cNvSpPr txBox="1"/>
+          <p:nvPr/>
+        </p:nvSpPr>
+        <p:spPr>
+          <a:xfrm>
+            <a:off x="8478926" y="5508439"/>
+            <a:ext cx="3403234" cy="369332"/>
+          </a:xfrm>
+          <a:prstGeom prst="rect">
+            <a:avLst/>
+          </a:prstGeom>
+          <a:noFill/>
+        </p:spPr>
+        <p:txBody>
+          <a:bodyPr wrap="square" rtlCol="0">
+            <a:spAutoFit/>
+          </a:bodyPr>
+          <a:lstStyle/>
+          <a:p>
+            <a:r>
+              <a:rPr lang="en-IN" b="1" dirty="0">
+                <a:solidFill>
+                  <a:srgbClr val="FF0000"/>
+                </a:solidFill>
+              </a:rPr>
+              <a:t>../test/busFabricExp2.dot</a:t>
+            </a:r>
+          </a:p>
+        </p:txBody>
+      </p:sp>
     </p:spTree>
     <p:extLst>
       <p:ext uri="{BB962C8B-B14F-4D97-AF65-F5344CB8AC3E}">
@@ -5235,19 +5210,19 @@
           <a:lstStyle/>
           <a:p>
             <a:r>
-              <a:rPr lang="en-US" sz="2000" b="1" dirty="0"/>
+              <a:rPr lang="en-US" sz="2000" b="1"/>
               <a:t>Experiment 3(a): </a:t>
             </a:r>
             <a:r>
-              <a:rPr lang="en-US" sz="2000" dirty="0"/>
+              <a:rPr lang="en-US" sz="2000"/>
               <a:t>Both</a:t>
             </a:r>
             <a:r>
-              <a:rPr lang="en-US" sz="2000" b="1" dirty="0"/>
+              <a:rPr lang="en-US" sz="2000" b="1"/>
               <a:t> </a:t>
             </a:r>
             <a:r>
-              <a:rPr lang="en-US" b="1" dirty="0">
+              <a:rPr lang="en-US" b="1">
                 <a:solidFill>
                   <a:srgbClr val="FF0000"/>
                 </a:solidFill>
@@ -5255,11 +5230,11 @@
               <a:t>IP6</a:t>
             </a:r>
             <a:r>
-              <a:rPr lang="en-US" dirty="0"/>
+              <a:rPr lang="en-US"/>
               <a:t> &amp; </a:t>
             </a:r>
             <a:r>
-              <a:rPr lang="en-US" b="1" dirty="0">
+              <a:rPr lang="en-US" b="1">
                 <a:solidFill>
                   <a:srgbClr val="00B050"/>
                 </a:solidFill>
@@ -5267,7 +5242,7 @@
               <a:t>IP0</a:t>
             </a:r>
             <a:r>
-              <a:rPr lang="en-US" dirty="0"/>
+              <a:rPr lang="en-US"/>
               <a:t>  has lower injection</a:t>
             </a:r>
           </a:p>
@@ -5587,7 +5562,7 @@
               <a:buChar char="•"/>
             </a:pPr>
             <a:r>
-              <a:rPr lang="en-US" sz="1400" dirty="0"/>
+              <a:rPr lang="en-US" sz="1400"/>
               <a:t>Buffer_ size  = 12</a:t>
             </a:r>
           </a:p>
@@ -5597,11 +5572,11 @@
               <a:buChar char="•"/>
             </a:pPr>
             <a:r>
-              <a:rPr lang="en-US" sz="1400" dirty="0"/>
+              <a:rPr lang="en-US" sz="1400"/>
               <a:t>IP0 has </a:t>
             </a:r>
             <a:r>
-              <a:rPr lang="en-US" sz="1400" dirty="0">
+              <a:rPr lang="en-US" sz="1400">
                 <a:solidFill>
                   <a:srgbClr val="00B050"/>
                 </a:solidFill>
@@ -5609,7 +5584,7 @@
               <a:t>higher priority </a:t>
             </a:r>
             <a:r>
-              <a:rPr lang="en-US" sz="1400" dirty="0"/>
+              <a:rPr lang="en-US" sz="1400"/>
               <a:t>than IP6.</a:t>
             </a:r>
           </a:p>
@@ -5619,11 +5594,11 @@
               <a:buChar char="•"/>
             </a:pPr>
             <a:r>
-              <a:rPr lang="en-US" sz="1400" b="1" dirty="0"/>
+              <a:rPr lang="en-US" sz="1400" b="1"/>
               <a:t>IP0 ‘s end-to-end latency </a:t>
             </a:r>
             <a:r>
-              <a:rPr lang="en-US" sz="1400" dirty="0"/>
+              <a:rPr lang="en-US" sz="1400"/>
               <a:t>= queue waiting time + pipeline delay = 0(BF0 -&gt; DIE0) + 34 = 34</a:t>
             </a:r>
           </a:p>
@@ -5633,15 +5608,15 @@
               <a:buChar char="•"/>
             </a:pPr>
             <a:r>
-              <a:rPr lang="en-US" sz="1400" dirty="0"/>
+              <a:rPr lang="en-US" sz="1400"/>
               <a:t>IP0’s waiting time 0 as IP0 has high priority, </a:t>
             </a:r>
             <a:r>
-              <a:rPr lang="en-US" sz="1400" b="1" dirty="0"/>
+              <a:rPr lang="en-US" sz="1400" b="1"/>
               <a:t>need not to wait</a:t>
             </a:r>
             <a:r>
-              <a:rPr lang="en-US" sz="1400" dirty="0"/>
+              <a:rPr lang="en-US" sz="1400"/>
               <a:t>.</a:t>
             </a:r>
           </a:p>
@@ -5651,11 +5626,11 @@
               <a:buChar char="•"/>
             </a:pPr>
             <a:r>
-              <a:rPr lang="en-US" sz="1400" b="1" dirty="0"/>
+              <a:rPr lang="en-US" sz="1400" b="1"/>
               <a:t>IP6 ‘s end-to-end latency </a:t>
             </a:r>
             <a:r>
-              <a:rPr lang="en-US" sz="1400" dirty="0"/>
+              <a:rPr lang="en-US" sz="1400"/>
               <a:t>= queue waiting time + pipeline delay = 0.05 +25(BF6 -&gt; BF0) + 34 (BF0 -&gt; DIE0)= 59.05</a:t>
             </a:r>
           </a:p>
@@ -5664,14 +5639,14 @@
               <a:buFont typeface="Arial" panose="020B0604020202020204" pitchFamily="34" charset="0"/>
               <a:buChar char="•"/>
             </a:pPr>
-            <a:endParaRPr lang="en-US" sz="1400" dirty="0"/>
+            <a:endParaRPr lang="en-US" sz="1400"/>
           </a:p>
           <a:p>
             <a:pPr marL="285750" indent="-285750">
               <a:buFont typeface="Arial" panose="020B0604020202020204" pitchFamily="34" charset="0"/>
               <a:buChar char="•"/>
             </a:pPr>
-            <a:endParaRPr lang="en-US" sz="1400" dirty="0"/>
+            <a:endParaRPr lang="en-US" sz="1400"/>
           </a:p>
         </p:txBody>
       </p:sp>
@@ -5782,6 +5757,45 @@
           </a:prstGeom>
         </p:spPr>
       </p:pic>
+      <p:sp>
+        <p:nvSpPr>
+          <p:cNvPr id="2" name="TextBox 1">
+            <a:extLst>
+              <a:ext uri="{FF2B5EF4-FFF2-40B4-BE49-F238E27FC236}">
+                <a16:creationId xmlns:a16="http://schemas.microsoft.com/office/drawing/2014/main" id="{BDBAA43F-B119-CFE8-FB51-05B5098E6536}"/>
+              </a:ext>
+            </a:extLst>
+          </p:cNvPr>
+          <p:cNvSpPr txBox="1"/>
+          <p:nvPr/>
+        </p:nvSpPr>
+        <p:spPr>
+          <a:xfrm>
+            <a:off x="8504903" y="5503984"/>
+            <a:ext cx="3403234" cy="369332"/>
+          </a:xfrm>
+          <a:prstGeom prst="rect">
+            <a:avLst/>
+          </a:prstGeom>
+          <a:noFill/>
+        </p:spPr>
+        <p:txBody>
+          <a:bodyPr wrap="square" rtlCol="0">
+            <a:spAutoFit/>
+          </a:bodyPr>
+          <a:lstStyle/>
+          <a:p>
+            <a:r>
+              <a:rPr lang="en-IN" b="1" dirty="0">
+                <a:solidFill>
+                  <a:srgbClr val="FF0000"/>
+                </a:solidFill>
+              </a:rPr>
+              <a:t>../test/busFabricExp3.dot</a:t>
+            </a:r>
+          </a:p>
+        </p:txBody>
+      </p:sp>
     </p:spTree>
     <p:extLst>
       <p:ext uri="{BB962C8B-B14F-4D97-AF65-F5344CB8AC3E}">
@@ -5841,11 +5855,11 @@
           <a:lstStyle/>
           <a:p>
             <a:r>
-              <a:rPr lang="en-US" sz="2000" b="1" dirty="0"/>
+              <a:rPr lang="en-US" sz="2000" b="1"/>
               <a:t>Experiment 3(b): </a:t>
             </a:r>
             <a:r>
-              <a:rPr lang="en-US" b="1" dirty="0">
+              <a:rPr lang="en-US" b="1">
                 <a:solidFill>
                   <a:srgbClr val="FF0000"/>
                 </a:solidFill>
@@ -5853,11 +5867,11 @@
               <a:t>IP6</a:t>
             </a:r>
             <a:r>
-              <a:rPr lang="en-US" dirty="0"/>
+              <a:rPr lang="en-US"/>
               <a:t> has lower injection rate &amp; </a:t>
             </a:r>
             <a:r>
-              <a:rPr lang="en-US" b="1" dirty="0">
+              <a:rPr lang="en-US" b="1">
                 <a:solidFill>
                   <a:srgbClr val="00B050"/>
                 </a:solidFill>
@@ -5865,7 +5879,7 @@
               <a:t>IP0</a:t>
             </a:r>
             <a:r>
-              <a:rPr lang="en-US" dirty="0"/>
+              <a:rPr lang="en-US"/>
               <a:t> has high injection rate </a:t>
             </a:r>
           </a:p>
@@ -6245,7 +6259,7 @@
               <a:buChar char="•"/>
             </a:pPr>
             <a:r>
-              <a:rPr lang="en-US" sz="1400" dirty="0"/>
+              <a:rPr lang="en-US" sz="1400"/>
               <a:t>Buffer_ size  = 12</a:t>
             </a:r>
           </a:p>
@@ -6255,11 +6269,11 @@
               <a:buChar char="•"/>
             </a:pPr>
             <a:r>
-              <a:rPr lang="en-US" sz="1400" dirty="0"/>
+              <a:rPr lang="en-US" sz="1400"/>
               <a:t>IP0 has </a:t>
             </a:r>
             <a:r>
-              <a:rPr lang="en-US" sz="1400" dirty="0">
+              <a:rPr lang="en-US" sz="1400">
                 <a:solidFill>
                   <a:srgbClr val="00B050"/>
                 </a:solidFill>
@@ -6267,7 +6281,7 @@
               <a:t>higher priority </a:t>
             </a:r>
             <a:r>
-              <a:rPr lang="en-US" sz="1400" dirty="0"/>
+              <a:rPr lang="en-US" sz="1400"/>
               <a:t>than IP6.</a:t>
             </a:r>
           </a:p>
@@ -6277,11 +6291,11 @@
               <a:buChar char="•"/>
             </a:pPr>
             <a:r>
-              <a:rPr lang="en-US" sz="1400" b="1" dirty="0"/>
+              <a:rPr lang="en-US" sz="1400" b="1"/>
               <a:t>IP0 ‘s end-to-end latency </a:t>
             </a:r>
             <a:r>
-              <a:rPr lang="en-US" sz="1400" dirty="0"/>
+              <a:rPr lang="en-US" sz="1400"/>
               <a:t>= queue waiting time + pipeline delay = 0(BF0 -&gt; DIE0) + 34 = 34</a:t>
             </a:r>
           </a:p>
@@ -6291,15 +6305,15 @@
               <a:buChar char="•"/>
             </a:pPr>
             <a:r>
-              <a:rPr lang="en-US" sz="1400" dirty="0"/>
+              <a:rPr lang="en-US" sz="1400"/>
               <a:t>IP0’s waiting time 0 as IP0 has high priority, </a:t>
             </a:r>
             <a:r>
-              <a:rPr lang="en-US" sz="1400" b="1" dirty="0"/>
+              <a:rPr lang="en-US" sz="1400" b="1"/>
               <a:t>need not to wait</a:t>
             </a:r>
             <a:r>
-              <a:rPr lang="en-US" sz="1400" dirty="0"/>
+              <a:rPr lang="en-US" sz="1400"/>
               <a:t>.</a:t>
             </a:r>
           </a:p>
@@ -6309,11 +6323,11 @@
               <a:buChar char="•"/>
             </a:pPr>
             <a:r>
-              <a:rPr lang="en-US" sz="1400" b="1" dirty="0"/>
+              <a:rPr lang="en-US" sz="1400" b="1"/>
               <a:t>IP6 ‘s end-to-end latency </a:t>
             </a:r>
             <a:r>
-              <a:rPr lang="en-US" sz="1400" dirty="0"/>
+              <a:rPr lang="en-US" sz="1400"/>
               <a:t>= queue waiting time + pipeline delay = 1.11 +25(BF6 -&gt; BF0) + 34 (BF0 -&gt; DIE0)= 60.11</a:t>
             </a:r>
           </a:p>
@@ -6322,14 +6336,14 @@
               <a:buFont typeface="Arial" panose="020B0604020202020204" pitchFamily="34" charset="0"/>
               <a:buChar char="•"/>
             </a:pPr>
-            <a:endParaRPr lang="en-US" sz="1400" dirty="0"/>
+            <a:endParaRPr lang="en-US" sz="1400"/>
           </a:p>
           <a:p>
             <a:pPr marL="285750" indent="-285750">
               <a:buFont typeface="Arial" panose="020B0604020202020204" pitchFamily="34" charset="0"/>
               <a:buChar char="•"/>
             </a:pPr>
-            <a:endParaRPr lang="en-US" sz="1400" dirty="0"/>
+            <a:endParaRPr lang="en-US" sz="1400"/>
           </a:p>
         </p:txBody>
       </p:sp>
@@ -6376,6 +6390,45 @@
           <a:p>
             <a:pPr algn="ctr"/>
             <a:endParaRPr lang="en-US"/>
+          </a:p>
+        </p:txBody>
+      </p:sp>
+      <p:sp>
+        <p:nvSpPr>
+          <p:cNvPr id="2" name="TextBox 1">
+            <a:extLst>
+              <a:ext uri="{FF2B5EF4-FFF2-40B4-BE49-F238E27FC236}">
+                <a16:creationId xmlns:a16="http://schemas.microsoft.com/office/drawing/2014/main" id="{AFF174DC-1045-DF7F-FB19-34DFA9383558}"/>
+              </a:ext>
+            </a:extLst>
+          </p:cNvPr>
+          <p:cNvSpPr txBox="1"/>
+          <p:nvPr/>
+        </p:nvSpPr>
+        <p:spPr>
+          <a:xfrm>
+            <a:off x="7895303" y="5489206"/>
+            <a:ext cx="3403234" cy="369332"/>
+          </a:xfrm>
+          <a:prstGeom prst="rect">
+            <a:avLst/>
+          </a:prstGeom>
+          <a:noFill/>
+        </p:spPr>
+        <p:txBody>
+          <a:bodyPr wrap="square" rtlCol="0">
+            <a:spAutoFit/>
+          </a:bodyPr>
+          <a:lstStyle/>
+          <a:p>
+            <a:r>
+              <a:rPr lang="en-IN" b="1" dirty="0">
+                <a:solidFill>
+                  <a:srgbClr val="FF0000"/>
+                </a:solidFill>
+              </a:rPr>
+              <a:t>../test/busFabricExp3.dot</a:t>
+            </a:r>
           </a:p>
         </p:txBody>
       </p:sp>
@@ -6444,11 +6497,11 @@
           <a:lstStyle/>
           <a:p>
             <a:r>
-              <a:rPr lang="en-US" sz="2000" b="1" dirty="0"/>
+              <a:rPr lang="en-US" sz="2000" b="1"/>
               <a:t>Experiment 3(b): Both </a:t>
             </a:r>
             <a:r>
-              <a:rPr lang="en-US" b="1" dirty="0">
+              <a:rPr lang="en-US" b="1">
                 <a:solidFill>
                   <a:srgbClr val="FF0000"/>
                 </a:solidFill>
@@ -6456,11 +6509,11 @@
               <a:t>IP6</a:t>
             </a:r>
             <a:r>
-              <a:rPr lang="en-US" dirty="0"/>
+              <a:rPr lang="en-US"/>
               <a:t> &amp; </a:t>
             </a:r>
             <a:r>
-              <a:rPr lang="en-US" b="1" dirty="0">
+              <a:rPr lang="en-US" b="1">
                 <a:solidFill>
                   <a:srgbClr val="00B050"/>
                 </a:solidFill>
@@ -6468,7 +6521,7 @@
               <a:t>IP0</a:t>
             </a:r>
             <a:r>
-              <a:rPr lang="en-US" dirty="0"/>
+              <a:rPr lang="en-US"/>
               <a:t> has high injection rate </a:t>
             </a:r>
           </a:p>
@@ -6788,7 +6841,7 @@
               <a:buChar char="•"/>
             </a:pPr>
             <a:r>
-              <a:rPr lang="en-US" sz="1400" dirty="0"/>
+              <a:rPr lang="en-US" sz="1400"/>
               <a:t>Buffer_ size  = 12</a:t>
             </a:r>
           </a:p>
@@ -6798,11 +6851,11 @@
               <a:buChar char="•"/>
             </a:pPr>
             <a:r>
-              <a:rPr lang="en-US" sz="1400" dirty="0"/>
+              <a:rPr lang="en-US" sz="1400"/>
               <a:t>IP0 has </a:t>
             </a:r>
             <a:r>
-              <a:rPr lang="en-US" sz="1400" dirty="0">
+              <a:rPr lang="en-US" sz="1400">
                 <a:solidFill>
                   <a:srgbClr val="00B050"/>
                 </a:solidFill>
@@ -6810,7 +6863,7 @@
               <a:t>higher priority </a:t>
             </a:r>
             <a:r>
-              <a:rPr lang="en-US" sz="1400" dirty="0"/>
+              <a:rPr lang="en-US" sz="1400"/>
               <a:t>than IP6.</a:t>
             </a:r>
           </a:p>
@@ -6820,11 +6873,11 @@
               <a:buChar char="•"/>
             </a:pPr>
             <a:r>
-              <a:rPr lang="en-US" sz="1400" b="1" dirty="0"/>
+              <a:rPr lang="en-US" sz="1400" b="1"/>
               <a:t>IP0 ‘s end-to-end latency </a:t>
             </a:r>
             <a:r>
-              <a:rPr lang="en-US" sz="1400" dirty="0"/>
+              <a:rPr lang="en-US" sz="1400"/>
               <a:t>= queue waiting time + pipeline delay = 0(BF0 -&gt; DIE0) + 34 = 34</a:t>
             </a:r>
           </a:p>
@@ -6834,15 +6887,15 @@
               <a:buChar char="•"/>
             </a:pPr>
             <a:r>
-              <a:rPr lang="en-US" sz="1400" dirty="0"/>
+              <a:rPr lang="en-US" sz="1400"/>
               <a:t>IP0’s waiting time 0 as IP0 has high priority, </a:t>
             </a:r>
             <a:r>
-              <a:rPr lang="en-US" sz="1400" b="1" dirty="0"/>
+              <a:rPr lang="en-US" sz="1400" b="1"/>
               <a:t>need not to wait</a:t>
             </a:r>
             <a:r>
-              <a:rPr lang="en-US" sz="1400" dirty="0"/>
+              <a:rPr lang="en-US" sz="1400"/>
               <a:t>.</a:t>
             </a:r>
           </a:p>
@@ -6852,11 +6905,11 @@
               <a:buChar char="•"/>
             </a:pPr>
             <a:r>
-              <a:rPr lang="en-US" sz="1400" b="1" dirty="0"/>
+              <a:rPr lang="en-US" sz="1400" b="1"/>
               <a:t>IP6 ‘s end-to-end latency </a:t>
             </a:r>
             <a:r>
-              <a:rPr lang="en-US" sz="1400" dirty="0"/>
+              <a:rPr lang="en-US" sz="1400"/>
               <a:t>= queue waiting time + pipeline delay = 5 +25(BF6 -&gt; BF0) + 34 (BF0 -&gt; DIE0)= 64</a:t>
             </a:r>
           </a:p>
@@ -6865,14 +6918,14 @@
               <a:buFont typeface="Arial" panose="020B0604020202020204" pitchFamily="34" charset="0"/>
               <a:buChar char="•"/>
             </a:pPr>
-            <a:endParaRPr lang="en-US" sz="1400" dirty="0"/>
+            <a:endParaRPr lang="en-US" sz="1400"/>
           </a:p>
           <a:p>
             <a:pPr marL="285750" indent="-285750">
               <a:buFont typeface="Arial" panose="020B0604020202020204" pitchFamily="34" charset="0"/>
               <a:buChar char="•"/>
             </a:pPr>
-            <a:endParaRPr lang="en-US" sz="1400" dirty="0"/>
+            <a:endParaRPr lang="en-US" sz="1400"/>
           </a:p>
         </p:txBody>
       </p:sp>
@@ -6983,6 +7036,45 @@
           </a:prstGeom>
         </p:spPr>
       </p:pic>
+      <p:sp>
+        <p:nvSpPr>
+          <p:cNvPr id="2" name="TextBox 1">
+            <a:extLst>
+              <a:ext uri="{FF2B5EF4-FFF2-40B4-BE49-F238E27FC236}">
+                <a16:creationId xmlns:a16="http://schemas.microsoft.com/office/drawing/2014/main" id="{CBE9FA9F-16A8-6553-C0E4-D55405F5E1E7}"/>
+              </a:ext>
+            </a:extLst>
+          </p:cNvPr>
+          <p:cNvSpPr txBox="1"/>
+          <p:nvPr/>
+        </p:nvSpPr>
+        <p:spPr>
+          <a:xfrm>
+            <a:off x="8622890" y="5397827"/>
+            <a:ext cx="3403234" cy="369332"/>
+          </a:xfrm>
+          <a:prstGeom prst="rect">
+            <a:avLst/>
+          </a:prstGeom>
+          <a:noFill/>
+        </p:spPr>
+        <p:txBody>
+          <a:bodyPr wrap="square" rtlCol="0">
+            <a:spAutoFit/>
+          </a:bodyPr>
+          <a:lstStyle/>
+          <a:p>
+            <a:r>
+              <a:rPr lang="en-IN" b="1" dirty="0">
+                <a:solidFill>
+                  <a:srgbClr val="FF0000"/>
+                </a:solidFill>
+              </a:rPr>
+              <a:t>../test/busFabricExp3.dot</a:t>
+            </a:r>
+          </a:p>
+        </p:txBody>
+      </p:sp>
     </p:spTree>
     <p:extLst>
       <p:ext uri="{BB962C8B-B14F-4D97-AF65-F5344CB8AC3E}">
@@ -7053,7 +7145,7 @@
           <a:lstStyle/>
           <a:p>
             <a:pPr algn="ctr"/>
-            <a:endParaRPr lang="en-US" dirty="0"/>
+            <a:endParaRPr lang="en-US"/>
           </a:p>
         </p:txBody>
       </p:sp>
@@ -7710,7 +7802,7 @@
           <a:p>
             <a:pPr algn="ctr"/>
             <a:r>
-              <a:rPr lang="en-US" dirty="0"/>
+              <a:rPr lang="en-US"/>
               <a:t>DIE0</a:t>
             </a:r>
           </a:p>
@@ -7788,7 +7880,7 @@
           <a:lstStyle/>
           <a:p>
             <a:r>
-              <a:rPr lang="en-US" dirty="0"/>
+              <a:rPr lang="en-US"/>
               <a:t>BF6</a:t>
             </a:r>
           </a:p>
@@ -7841,7 +7933,7 @@
           <a:p>
             <a:pPr algn="ctr"/>
             <a:r>
-              <a:rPr lang="en-US" dirty="0"/>
+              <a:rPr lang="en-US"/>
               <a:t>ARB</a:t>
             </a:r>
           </a:p>
@@ -7917,7 +8009,7 @@
           <a:lstStyle/>
           <a:p>
             <a:r>
-              <a:rPr lang="en-US" dirty="0"/>
+              <a:rPr lang="en-US"/>
               <a:t>Ingress</a:t>
             </a:r>
           </a:p>
@@ -7952,7 +8044,7 @@
           <a:lstStyle/>
           <a:p>
             <a:r>
-              <a:rPr lang="en-US" dirty="0"/>
+              <a:rPr lang="en-US"/>
               <a:t>egress</a:t>
             </a:r>
           </a:p>
@@ -8078,7 +8170,7 @@
           <a:lstStyle/>
           <a:p>
             <a:pPr algn="ctr"/>
-            <a:endParaRPr lang="en-US" dirty="0"/>
+            <a:endParaRPr lang="en-US"/>
           </a:p>
         </p:txBody>
       </p:sp>
@@ -8250,7 +8342,7 @@
               <a:lstStyle/>
               <a:p>
                 <a:pPr algn="ctr"/>
-                <a:endParaRPr lang="en-US" dirty="0"/>
+                <a:endParaRPr lang="en-US"/>
               </a:p>
             </p:txBody>
           </p:sp>
@@ -8723,7 +8815,7 @@
           <a:lstStyle/>
           <a:p>
             <a:r>
-              <a:rPr lang="en-US" dirty="0"/>
+              <a:rPr lang="en-US"/>
               <a:t>BF0</a:t>
             </a:r>
           </a:p>
@@ -8776,7 +8868,7 @@
           <a:p>
             <a:pPr algn="ctr"/>
             <a:r>
-              <a:rPr lang="en-US" dirty="0"/>
+              <a:rPr lang="en-US"/>
               <a:t>ARB</a:t>
             </a:r>
           </a:p>
@@ -8811,7 +8903,7 @@
           <a:lstStyle/>
           <a:p>
             <a:r>
-              <a:rPr lang="en-US" dirty="0"/>
+              <a:rPr lang="en-US"/>
               <a:t>Ingress</a:t>
             </a:r>
           </a:p>
@@ -8846,7 +8938,7 @@
           <a:lstStyle/>
           <a:p>
             <a:r>
-              <a:rPr lang="en-US" dirty="0"/>
+              <a:rPr lang="en-US"/>
               <a:t>egress</a:t>
             </a:r>
           </a:p>
@@ -9003,7 +9095,7 @@
           <a:lstStyle/>
           <a:p>
             <a:r>
-              <a:rPr lang="en-US" dirty="0"/>
+              <a:rPr lang="en-US"/>
               <a:t>Avg Latency = 59cyl</a:t>
             </a:r>
           </a:p>
@@ -9280,7 +9372,7 @@
           <a:lstStyle/>
           <a:p>
             <a:r>
-              <a:rPr lang="en-US" dirty="0"/>
+              <a:rPr lang="en-US"/>
               <a:t>10cyl</a:t>
             </a:r>
           </a:p>
@@ -9354,7 +9446,7 @@
           <a:lstStyle/>
           <a:p>
             <a:r>
-              <a:rPr lang="en-US" dirty="0"/>
+              <a:rPr lang="en-US"/>
               <a:t>1+1+3+3+1+3+3=15cyl</a:t>
             </a:r>
           </a:p>
@@ -9389,7 +9481,7 @@
           <a:lstStyle/>
           <a:p>
             <a:r>
-              <a:rPr lang="en-US" dirty="0"/>
+              <a:rPr lang="en-US"/>
               <a:t>17+2 = 19cyl</a:t>
             </a:r>
           </a:p>
@@ -9543,7 +9635,7 @@
           <a:lstStyle/>
           <a:p>
             <a:r>
-              <a:rPr lang="en-US" dirty="0"/>
+              <a:rPr lang="en-US"/>
               <a:t>1+1+3+3+1+3+3=15cyl</a:t>
             </a:r>
           </a:p>
@@ -9717,7 +9809,7 @@
               <a:lstStyle/>
               <a:p>
                 <a:pPr algn="ctr"/>
-                <a:endParaRPr lang="en-US" dirty="0"/>
+                <a:endParaRPr lang="en-US"/>
               </a:p>
             </p:txBody>
           </p:sp>
@@ -10018,7 +10110,7 @@
           <a:p>
             <a:pPr algn="ctr"/>
             <a:r>
-              <a:rPr lang="en-US" dirty="0"/>
+              <a:rPr lang="en-US"/>
               <a:t>IP6</a:t>
             </a:r>
           </a:p>
@@ -10065,221 +10157,9 @@
           <a:p>
             <a:pPr algn="ctr"/>
             <a:r>
-              <a:rPr lang="en-US" dirty="0"/>
+              <a:rPr lang="en-US"/>
               <a:t>IP0</a:t>
             </a:r>
-          </a:p>
-        </p:txBody>
-      </p:sp>
-      <p:sp>
-        <p:nvSpPr>
-          <p:cNvPr id="153" name="Content Placeholder 2">
-            <a:extLst>
-              <a:ext uri="{FF2B5EF4-FFF2-40B4-BE49-F238E27FC236}">
-                <a16:creationId xmlns:a16="http://schemas.microsoft.com/office/drawing/2014/main" id="{29AB2614-E470-231B-BAFE-AAFD30F7ECEE}"/>
-              </a:ext>
-            </a:extLst>
-          </p:cNvPr>
-          <p:cNvSpPr txBox="1">
-            <a:spLocks/>
-          </p:cNvSpPr>
-          <p:nvPr/>
-        </p:nvSpPr>
-        <p:spPr>
-          <a:xfrm>
-            <a:off x="838200" y="4781016"/>
-            <a:ext cx="11353800" cy="1778314"/>
-          </a:xfrm>
-          <a:prstGeom prst="rect">
-            <a:avLst/>
-          </a:prstGeom>
-        </p:spPr>
-        <p:txBody>
-          <a:bodyPr vert="horz" lIns="91440" tIns="45720" rIns="91440" bIns="45720" rtlCol="0">
-            <a:normAutofit/>
-          </a:bodyPr>
-          <a:lstStyle>
-            <a:lvl1pPr marL="0" indent="0" algn="ctr" defTabSz="914400" rtl="0" eaLnBrk="1" latinLnBrk="0" hangingPunct="1">
-              <a:lnSpc>
-                <a:spcPct val="90000"/>
-              </a:lnSpc>
-              <a:spcBef>
-                <a:spcPts val="1000"/>
-              </a:spcBef>
-              <a:buFont typeface="Arial" panose="020B0604020202020204" pitchFamily="34" charset="0"/>
-              <a:buNone/>
-              <a:defRPr sz="2400" kern="1200">
-                <a:solidFill>
-                  <a:schemeClr val="tx1"/>
-                </a:solidFill>
-                <a:latin typeface="+mn-lt"/>
-                <a:ea typeface="+mn-ea"/>
-                <a:cs typeface="+mn-cs"/>
-              </a:defRPr>
-            </a:lvl1pPr>
-            <a:lvl2pPr marL="457200" indent="0" algn="ctr" defTabSz="914400" rtl="0" eaLnBrk="1" latinLnBrk="0" hangingPunct="1">
-              <a:lnSpc>
-                <a:spcPct val="90000"/>
-              </a:lnSpc>
-              <a:spcBef>
-                <a:spcPts val="500"/>
-              </a:spcBef>
-              <a:buFont typeface="Arial" panose="020B0604020202020204" pitchFamily="34" charset="0"/>
-              <a:buNone/>
-              <a:defRPr sz="2000" kern="1200">
-                <a:solidFill>
-                  <a:schemeClr val="tx1"/>
-                </a:solidFill>
-                <a:latin typeface="+mn-lt"/>
-                <a:ea typeface="+mn-ea"/>
-                <a:cs typeface="+mn-cs"/>
-              </a:defRPr>
-            </a:lvl2pPr>
-            <a:lvl3pPr marL="914400" indent="0" algn="ctr" defTabSz="914400" rtl="0" eaLnBrk="1" latinLnBrk="0" hangingPunct="1">
-              <a:lnSpc>
-                <a:spcPct val="90000"/>
-              </a:lnSpc>
-              <a:spcBef>
-                <a:spcPts val="500"/>
-              </a:spcBef>
-              <a:buFont typeface="Arial" panose="020B0604020202020204" pitchFamily="34" charset="0"/>
-              <a:buNone/>
-              <a:defRPr sz="1800" kern="1200">
-                <a:solidFill>
-                  <a:schemeClr val="tx1"/>
-                </a:solidFill>
-                <a:latin typeface="+mn-lt"/>
-                <a:ea typeface="+mn-ea"/>
-                <a:cs typeface="+mn-cs"/>
-              </a:defRPr>
-            </a:lvl3pPr>
-            <a:lvl4pPr marL="1371600" indent="0" algn="ctr" defTabSz="914400" rtl="0" eaLnBrk="1" latinLnBrk="0" hangingPunct="1">
-              <a:lnSpc>
-                <a:spcPct val="90000"/>
-              </a:lnSpc>
-              <a:spcBef>
-                <a:spcPts val="500"/>
-              </a:spcBef>
-              <a:buFont typeface="Arial" panose="020B0604020202020204" pitchFamily="34" charset="0"/>
-              <a:buNone/>
-              <a:defRPr sz="1600" kern="1200">
-                <a:solidFill>
-                  <a:schemeClr val="tx1"/>
-                </a:solidFill>
-                <a:latin typeface="+mn-lt"/>
-                <a:ea typeface="+mn-ea"/>
-                <a:cs typeface="+mn-cs"/>
-              </a:defRPr>
-            </a:lvl4pPr>
-            <a:lvl5pPr marL="1828800" indent="0" algn="ctr" defTabSz="914400" rtl="0" eaLnBrk="1" latinLnBrk="0" hangingPunct="1">
-              <a:lnSpc>
-                <a:spcPct val="90000"/>
-              </a:lnSpc>
-              <a:spcBef>
-                <a:spcPts val="500"/>
-              </a:spcBef>
-              <a:buFont typeface="Arial" panose="020B0604020202020204" pitchFamily="34" charset="0"/>
-              <a:buNone/>
-              <a:defRPr sz="1600" kern="1200">
-                <a:solidFill>
-                  <a:schemeClr val="tx1"/>
-                </a:solidFill>
-                <a:latin typeface="+mn-lt"/>
-                <a:ea typeface="+mn-ea"/>
-                <a:cs typeface="+mn-cs"/>
-              </a:defRPr>
-            </a:lvl5pPr>
-            <a:lvl6pPr marL="2286000" indent="0" algn="ctr" defTabSz="914400" rtl="0" eaLnBrk="1" latinLnBrk="0" hangingPunct="1">
-              <a:lnSpc>
-                <a:spcPct val="90000"/>
-              </a:lnSpc>
-              <a:spcBef>
-                <a:spcPts val="500"/>
-              </a:spcBef>
-              <a:buFont typeface="Arial" panose="020B0604020202020204" pitchFamily="34" charset="0"/>
-              <a:buNone/>
-              <a:defRPr sz="1600" kern="1200">
-                <a:solidFill>
-                  <a:schemeClr val="tx1"/>
-                </a:solidFill>
-                <a:latin typeface="+mn-lt"/>
-                <a:ea typeface="+mn-ea"/>
-                <a:cs typeface="+mn-cs"/>
-              </a:defRPr>
-            </a:lvl6pPr>
-            <a:lvl7pPr marL="2743200" indent="0" algn="ctr" defTabSz="914400" rtl="0" eaLnBrk="1" latinLnBrk="0" hangingPunct="1">
-              <a:lnSpc>
-                <a:spcPct val="90000"/>
-              </a:lnSpc>
-              <a:spcBef>
-                <a:spcPts val="500"/>
-              </a:spcBef>
-              <a:buFont typeface="Arial" panose="020B0604020202020204" pitchFamily="34" charset="0"/>
-              <a:buNone/>
-              <a:defRPr sz="1600" kern="1200">
-                <a:solidFill>
-                  <a:schemeClr val="tx1"/>
-                </a:solidFill>
-                <a:latin typeface="+mn-lt"/>
-                <a:ea typeface="+mn-ea"/>
-                <a:cs typeface="+mn-cs"/>
-              </a:defRPr>
-            </a:lvl7pPr>
-            <a:lvl8pPr marL="3200400" indent="0" algn="ctr" defTabSz="914400" rtl="0" eaLnBrk="1" latinLnBrk="0" hangingPunct="1">
-              <a:lnSpc>
-                <a:spcPct val="90000"/>
-              </a:lnSpc>
-              <a:spcBef>
-                <a:spcPts val="500"/>
-              </a:spcBef>
-              <a:buFont typeface="Arial" panose="020B0604020202020204" pitchFamily="34" charset="0"/>
-              <a:buNone/>
-              <a:defRPr sz="1600" kern="1200">
-                <a:solidFill>
-                  <a:schemeClr val="tx1"/>
-                </a:solidFill>
-                <a:latin typeface="+mn-lt"/>
-                <a:ea typeface="+mn-ea"/>
-                <a:cs typeface="+mn-cs"/>
-              </a:defRPr>
-            </a:lvl8pPr>
-            <a:lvl9pPr marL="3657600" indent="0" algn="ctr" defTabSz="914400" rtl="0" eaLnBrk="1" latinLnBrk="0" hangingPunct="1">
-              <a:lnSpc>
-                <a:spcPct val="90000"/>
-              </a:lnSpc>
-              <a:spcBef>
-                <a:spcPts val="500"/>
-              </a:spcBef>
-              <a:buFont typeface="Arial" panose="020B0604020202020204" pitchFamily="34" charset="0"/>
-              <a:buNone/>
-              <a:defRPr sz="1600" kern="1200">
-                <a:solidFill>
-                  <a:schemeClr val="tx1"/>
-                </a:solidFill>
-                <a:latin typeface="+mn-lt"/>
-                <a:ea typeface="+mn-ea"/>
-                <a:cs typeface="+mn-cs"/>
-              </a:defRPr>
-            </a:lvl9pPr>
-          </a:lstStyle>
-          <a:p>
-            <a:r>
-              <a:rPr lang="en-US"/>
-              <a:t>The breaks up are the same within the PSF as seen in IP0-&gt;BF0-&gt;DIE0</a:t>
-            </a:r>
-          </a:p>
-          <a:p>
-            <a:r>
-              <a:rPr lang="en-US"/>
-              <a:t>From BF6-&gt; BF0, there is 10 cycle delay </a:t>
-            </a:r>
-          </a:p>
-          <a:p>
-            <a:r>
-              <a:rPr lang="en-US"/>
-              <a:t>From BF0-&gt; DIE0, there is 19 cycle delay</a:t>
-            </a:r>
-            <a:endParaRPr lang="en-US" dirty="0"/>
           </a:p>
         </p:txBody>
       </p:sp>
@@ -10312,7 +10192,7 @@
           <a:lstStyle/>
           <a:p>
             <a:r>
-              <a:rPr lang="en-US" dirty="0"/>
+              <a:rPr lang="en-US"/>
               <a:t>Back up</a:t>
             </a:r>
           </a:p>
@@ -10322,6 +10202,3303 @@
     <p:extLst>
       <p:ext uri="{BB962C8B-B14F-4D97-AF65-F5344CB8AC3E}">
         <p14:creationId xmlns:p14="http://schemas.microsoft.com/office/powerpoint/2010/main" val="2133337171"/>
+      </p:ext>
+    </p:extLst>
+  </p:cSld>
+  <p:clrMapOvr>
+    <a:masterClrMapping/>
+  </p:clrMapOvr>
+</p:sld>
+</file>
+
+<file path=ppt/slides/slide8.xml><?xml version="1.0" encoding="utf-8"?>
+<p:sld xmlns:a="http://schemas.openxmlformats.org/drawingml/2006/main" xmlns:r="http://schemas.openxmlformats.org/officeDocument/2006/relationships" xmlns:p="http://schemas.openxmlformats.org/presentationml/2006/main">
+  <p:cSld>
+    <p:spTree>
+      <p:nvGrpSpPr>
+        <p:cNvPr id="1" name=""/>
+        <p:cNvGrpSpPr/>
+        <p:nvPr/>
+      </p:nvGrpSpPr>
+      <p:grpSpPr>
+        <a:xfrm>
+          <a:off x="0" y="0"/>
+          <a:ext cx="0" cy="0"/>
+          <a:chOff x="0" y="0"/>
+          <a:chExt cx="0" cy="0"/>
+        </a:xfrm>
+      </p:grpSpPr>
+      <p:sp>
+        <p:nvSpPr>
+          <p:cNvPr id="4" name="Rectangle 3">
+            <a:extLst>
+              <a:ext uri="{FF2B5EF4-FFF2-40B4-BE49-F238E27FC236}">
+                <a16:creationId xmlns:a16="http://schemas.microsoft.com/office/drawing/2014/main" id="{B18F3AF8-5354-F57F-E43C-6351FD3F5859}"/>
+              </a:ext>
+            </a:extLst>
+          </p:cNvPr>
+          <p:cNvSpPr/>
+          <p:nvPr/>
+        </p:nvSpPr>
+        <p:spPr>
+          <a:xfrm rot="5400000">
+            <a:off x="2405322" y="1020448"/>
+            <a:ext cx="1463039" cy="2797832"/>
+          </a:xfrm>
+          <a:prstGeom prst="rect">
+            <a:avLst/>
+          </a:prstGeom>
+        </p:spPr>
+        <p:style>
+          <a:lnRef idx="2">
+            <a:schemeClr val="dk1"/>
+          </a:lnRef>
+          <a:fillRef idx="1">
+            <a:schemeClr val="lt1"/>
+          </a:fillRef>
+          <a:effectRef idx="0">
+            <a:schemeClr val="dk1"/>
+          </a:effectRef>
+          <a:fontRef idx="minor">
+            <a:schemeClr val="dk1"/>
+          </a:fontRef>
+        </p:style>
+        <p:txBody>
+          <a:bodyPr rtlCol="0" anchor="ctr"/>
+          <a:lstStyle/>
+          <a:p>
+            <a:pPr algn="ctr"/>
+            <a:endParaRPr lang="en-US"/>
+          </a:p>
+        </p:txBody>
+      </p:sp>
+      <p:grpSp>
+        <p:nvGrpSpPr>
+          <p:cNvPr id="5" name="Group 4">
+            <a:extLst>
+              <a:ext uri="{FF2B5EF4-FFF2-40B4-BE49-F238E27FC236}">
+                <a16:creationId xmlns:a16="http://schemas.microsoft.com/office/drawing/2014/main" id="{741933A6-4A5A-B2F9-5620-4AFF27FC9056}"/>
+              </a:ext>
+            </a:extLst>
+          </p:cNvPr>
+          <p:cNvGrpSpPr/>
+          <p:nvPr/>
+        </p:nvGrpSpPr>
+        <p:grpSpPr>
+          <a:xfrm rot="5400000">
+            <a:off x="1902469" y="2290984"/>
+            <a:ext cx="203896" cy="289293"/>
+            <a:chOff x="5296757" y="6077632"/>
+            <a:chExt cx="203896" cy="289293"/>
+          </a:xfrm>
+        </p:grpSpPr>
+        <p:sp>
+          <p:nvSpPr>
+            <p:cNvPr id="6" name="Rectangle 5">
+              <a:extLst>
+                <a:ext uri="{FF2B5EF4-FFF2-40B4-BE49-F238E27FC236}">
+                  <a16:creationId xmlns:a16="http://schemas.microsoft.com/office/drawing/2014/main" id="{2F3E7141-A5F3-1831-26BD-59F7A8653A29}"/>
+                </a:ext>
+              </a:extLst>
+            </p:cNvPr>
+            <p:cNvSpPr/>
+            <p:nvPr/>
+          </p:nvSpPr>
+          <p:spPr>
+            <a:xfrm>
+              <a:off x="5296757" y="6077632"/>
+              <a:ext cx="203896" cy="289293"/>
+            </a:xfrm>
+            <a:prstGeom prst="rect">
+              <a:avLst/>
+            </a:prstGeom>
+          </p:spPr>
+          <p:style>
+            <a:lnRef idx="2">
+              <a:schemeClr val="dk1"/>
+            </a:lnRef>
+            <a:fillRef idx="1">
+              <a:schemeClr val="lt1"/>
+            </a:fillRef>
+            <a:effectRef idx="0">
+              <a:schemeClr val="dk1"/>
+            </a:effectRef>
+            <a:fontRef idx="minor">
+              <a:schemeClr val="dk1"/>
+            </a:fontRef>
+          </p:style>
+          <p:txBody>
+            <a:bodyPr rtlCol="0" anchor="ctr"/>
+            <a:lstStyle/>
+            <a:p>
+              <a:pPr algn="ctr"/>
+              <a:endParaRPr lang="en-US"/>
+            </a:p>
+          </p:txBody>
+        </p:sp>
+        <p:grpSp>
+          <p:nvGrpSpPr>
+            <p:cNvPr id="7" name="Group 6">
+              <a:extLst>
+                <a:ext uri="{FF2B5EF4-FFF2-40B4-BE49-F238E27FC236}">
+                  <a16:creationId xmlns:a16="http://schemas.microsoft.com/office/drawing/2014/main" id="{CB4FEDFE-315A-4580-D54F-4D051AF886DA}"/>
+                </a:ext>
+              </a:extLst>
+            </p:cNvPr>
+            <p:cNvGrpSpPr/>
+            <p:nvPr/>
+          </p:nvGrpSpPr>
+          <p:grpSpPr>
+            <a:xfrm>
+              <a:off x="5296757" y="6077632"/>
+              <a:ext cx="203896" cy="281883"/>
+              <a:chOff x="3659026" y="5581650"/>
+              <a:chExt cx="203896" cy="281883"/>
+            </a:xfrm>
+          </p:grpSpPr>
+          <p:sp>
+            <p:nvSpPr>
+              <p:cNvPr id="8" name="Rectangle 7">
+                <a:extLst>
+                  <a:ext uri="{FF2B5EF4-FFF2-40B4-BE49-F238E27FC236}">
+                    <a16:creationId xmlns:a16="http://schemas.microsoft.com/office/drawing/2014/main" id="{CCCDBDEC-622D-50AF-7BA5-721B064DF666}"/>
+                  </a:ext>
+                </a:extLst>
+              </p:cNvPr>
+              <p:cNvSpPr/>
+              <p:nvPr/>
+            </p:nvSpPr>
+            <p:spPr>
+              <a:xfrm>
+                <a:off x="3659026" y="5581650"/>
+                <a:ext cx="203896" cy="47356"/>
+              </a:xfrm>
+              <a:prstGeom prst="rect">
+                <a:avLst/>
+              </a:prstGeom>
+            </p:spPr>
+            <p:style>
+              <a:lnRef idx="2">
+                <a:schemeClr val="dk1"/>
+              </a:lnRef>
+              <a:fillRef idx="1">
+                <a:schemeClr val="lt1"/>
+              </a:fillRef>
+              <a:effectRef idx="0">
+                <a:schemeClr val="dk1"/>
+              </a:effectRef>
+              <a:fontRef idx="minor">
+                <a:schemeClr val="dk1"/>
+              </a:fontRef>
+            </p:style>
+            <p:txBody>
+              <a:bodyPr rtlCol="0" anchor="ctr"/>
+              <a:lstStyle/>
+              <a:p>
+                <a:pPr algn="ctr"/>
+                <a:endParaRPr lang="en-US"/>
+              </a:p>
+            </p:txBody>
+          </p:sp>
+          <p:sp>
+            <p:nvSpPr>
+              <p:cNvPr id="9" name="Rectangle 8">
+                <a:extLst>
+                  <a:ext uri="{FF2B5EF4-FFF2-40B4-BE49-F238E27FC236}">
+                    <a16:creationId xmlns:a16="http://schemas.microsoft.com/office/drawing/2014/main" id="{B2ADBFF3-5688-AA0A-33AC-22BB701D8F6B}"/>
+                  </a:ext>
+                </a:extLst>
+              </p:cNvPr>
+              <p:cNvSpPr/>
+              <p:nvPr/>
+            </p:nvSpPr>
+            <p:spPr>
+              <a:xfrm>
+                <a:off x="3659026" y="5638162"/>
+                <a:ext cx="203896" cy="47356"/>
+              </a:xfrm>
+              <a:prstGeom prst="rect">
+                <a:avLst/>
+              </a:prstGeom>
+            </p:spPr>
+            <p:style>
+              <a:lnRef idx="2">
+                <a:schemeClr val="dk1"/>
+              </a:lnRef>
+              <a:fillRef idx="1">
+                <a:schemeClr val="lt1"/>
+              </a:fillRef>
+              <a:effectRef idx="0">
+                <a:schemeClr val="dk1"/>
+              </a:effectRef>
+              <a:fontRef idx="minor">
+                <a:schemeClr val="dk1"/>
+              </a:fontRef>
+            </p:style>
+            <p:txBody>
+              <a:bodyPr rtlCol="0" anchor="ctr"/>
+              <a:lstStyle/>
+              <a:p>
+                <a:pPr algn="ctr"/>
+                <a:endParaRPr lang="en-US"/>
+              </a:p>
+            </p:txBody>
+          </p:sp>
+          <p:sp>
+            <p:nvSpPr>
+              <p:cNvPr id="10" name="Rectangle 9">
+                <a:extLst>
+                  <a:ext uri="{FF2B5EF4-FFF2-40B4-BE49-F238E27FC236}">
+                    <a16:creationId xmlns:a16="http://schemas.microsoft.com/office/drawing/2014/main" id="{B9B1D13A-ED5F-33B6-DB4C-5C61BF4F70C5}"/>
+                  </a:ext>
+                </a:extLst>
+              </p:cNvPr>
+              <p:cNvSpPr/>
+              <p:nvPr/>
+            </p:nvSpPr>
+            <p:spPr>
+              <a:xfrm>
+                <a:off x="3659026" y="5694674"/>
+                <a:ext cx="203896" cy="47356"/>
+              </a:xfrm>
+              <a:prstGeom prst="rect">
+                <a:avLst/>
+              </a:prstGeom>
+            </p:spPr>
+            <p:style>
+              <a:lnRef idx="2">
+                <a:schemeClr val="dk1"/>
+              </a:lnRef>
+              <a:fillRef idx="1">
+                <a:schemeClr val="lt1"/>
+              </a:fillRef>
+              <a:effectRef idx="0">
+                <a:schemeClr val="dk1"/>
+              </a:effectRef>
+              <a:fontRef idx="minor">
+                <a:schemeClr val="dk1"/>
+              </a:fontRef>
+            </p:style>
+            <p:txBody>
+              <a:bodyPr rtlCol="0" anchor="ctr"/>
+              <a:lstStyle/>
+              <a:p>
+                <a:pPr algn="ctr"/>
+                <a:endParaRPr lang="en-US"/>
+              </a:p>
+            </p:txBody>
+          </p:sp>
+          <p:sp>
+            <p:nvSpPr>
+              <p:cNvPr id="11" name="Rectangle 10">
+                <a:extLst>
+                  <a:ext uri="{FF2B5EF4-FFF2-40B4-BE49-F238E27FC236}">
+                    <a16:creationId xmlns:a16="http://schemas.microsoft.com/office/drawing/2014/main" id="{BEA7EEF9-A4B6-875E-D9F1-87AA1B935FBB}"/>
+                  </a:ext>
+                </a:extLst>
+              </p:cNvPr>
+              <p:cNvSpPr/>
+              <p:nvPr/>
+            </p:nvSpPr>
+            <p:spPr>
+              <a:xfrm>
+                <a:off x="3659026" y="5751186"/>
+                <a:ext cx="203896" cy="47356"/>
+              </a:xfrm>
+              <a:prstGeom prst="rect">
+                <a:avLst/>
+              </a:prstGeom>
+            </p:spPr>
+            <p:style>
+              <a:lnRef idx="2">
+                <a:schemeClr val="dk1"/>
+              </a:lnRef>
+              <a:fillRef idx="1">
+                <a:schemeClr val="lt1"/>
+              </a:fillRef>
+              <a:effectRef idx="0">
+                <a:schemeClr val="dk1"/>
+              </a:effectRef>
+              <a:fontRef idx="minor">
+                <a:schemeClr val="dk1"/>
+              </a:fontRef>
+            </p:style>
+            <p:txBody>
+              <a:bodyPr rtlCol="0" anchor="ctr"/>
+              <a:lstStyle/>
+              <a:p>
+                <a:pPr algn="ctr"/>
+                <a:endParaRPr lang="en-US"/>
+              </a:p>
+            </p:txBody>
+          </p:sp>
+          <p:sp>
+            <p:nvSpPr>
+              <p:cNvPr id="12" name="Rectangle 11">
+                <a:extLst>
+                  <a:ext uri="{FF2B5EF4-FFF2-40B4-BE49-F238E27FC236}">
+                    <a16:creationId xmlns:a16="http://schemas.microsoft.com/office/drawing/2014/main" id="{A31CED93-5770-7A1F-1C60-784EDAA60E82}"/>
+                  </a:ext>
+                </a:extLst>
+              </p:cNvPr>
+              <p:cNvSpPr/>
+              <p:nvPr/>
+            </p:nvSpPr>
+            <p:spPr>
+              <a:xfrm>
+                <a:off x="3659026" y="5816177"/>
+                <a:ext cx="203896" cy="47356"/>
+              </a:xfrm>
+              <a:prstGeom prst="rect">
+                <a:avLst/>
+              </a:prstGeom>
+            </p:spPr>
+            <p:style>
+              <a:lnRef idx="2">
+                <a:schemeClr val="dk1"/>
+              </a:lnRef>
+              <a:fillRef idx="1">
+                <a:schemeClr val="lt1"/>
+              </a:fillRef>
+              <a:effectRef idx="0">
+                <a:schemeClr val="dk1"/>
+              </a:effectRef>
+              <a:fontRef idx="minor">
+                <a:schemeClr val="dk1"/>
+              </a:fontRef>
+            </p:style>
+            <p:txBody>
+              <a:bodyPr rtlCol="0" anchor="ctr"/>
+              <a:lstStyle/>
+              <a:p>
+                <a:pPr algn="ctr"/>
+                <a:endParaRPr lang="en-US"/>
+              </a:p>
+            </p:txBody>
+          </p:sp>
+        </p:grpSp>
+      </p:grpSp>
+      <p:grpSp>
+        <p:nvGrpSpPr>
+          <p:cNvPr id="13" name="Group 12">
+            <a:extLst>
+              <a:ext uri="{FF2B5EF4-FFF2-40B4-BE49-F238E27FC236}">
+                <a16:creationId xmlns:a16="http://schemas.microsoft.com/office/drawing/2014/main" id="{C0C2AA27-AE5B-F659-DED0-F462BB5A9805}"/>
+              </a:ext>
+            </a:extLst>
+          </p:cNvPr>
+          <p:cNvGrpSpPr/>
+          <p:nvPr/>
+        </p:nvGrpSpPr>
+        <p:grpSpPr>
+          <a:xfrm rot="5400000">
+            <a:off x="4320940" y="2290985"/>
+            <a:ext cx="203896" cy="289293"/>
+            <a:chOff x="5296757" y="6077632"/>
+            <a:chExt cx="203896" cy="289293"/>
+          </a:xfrm>
+        </p:grpSpPr>
+        <p:sp>
+          <p:nvSpPr>
+            <p:cNvPr id="14" name="Rectangle 13">
+              <a:extLst>
+                <a:ext uri="{FF2B5EF4-FFF2-40B4-BE49-F238E27FC236}">
+                  <a16:creationId xmlns:a16="http://schemas.microsoft.com/office/drawing/2014/main" id="{E3A19D9B-5B6D-BF59-68B0-0AEF57CF8F17}"/>
+                </a:ext>
+              </a:extLst>
+            </p:cNvPr>
+            <p:cNvSpPr/>
+            <p:nvPr/>
+          </p:nvSpPr>
+          <p:spPr>
+            <a:xfrm>
+              <a:off x="5296757" y="6077632"/>
+              <a:ext cx="203896" cy="289293"/>
+            </a:xfrm>
+            <a:prstGeom prst="rect">
+              <a:avLst/>
+            </a:prstGeom>
+          </p:spPr>
+          <p:style>
+            <a:lnRef idx="2">
+              <a:schemeClr val="dk1"/>
+            </a:lnRef>
+            <a:fillRef idx="1">
+              <a:schemeClr val="lt1"/>
+            </a:fillRef>
+            <a:effectRef idx="0">
+              <a:schemeClr val="dk1"/>
+            </a:effectRef>
+            <a:fontRef idx="minor">
+              <a:schemeClr val="dk1"/>
+            </a:fontRef>
+          </p:style>
+          <p:txBody>
+            <a:bodyPr rtlCol="0" anchor="ctr"/>
+            <a:lstStyle/>
+            <a:p>
+              <a:pPr algn="ctr"/>
+              <a:endParaRPr lang="en-US"/>
+            </a:p>
+          </p:txBody>
+        </p:sp>
+        <p:grpSp>
+          <p:nvGrpSpPr>
+            <p:cNvPr id="15" name="Group 14">
+              <a:extLst>
+                <a:ext uri="{FF2B5EF4-FFF2-40B4-BE49-F238E27FC236}">
+                  <a16:creationId xmlns:a16="http://schemas.microsoft.com/office/drawing/2014/main" id="{36E2656A-421B-F9EC-04B1-D63F6A2132A0}"/>
+                </a:ext>
+              </a:extLst>
+            </p:cNvPr>
+            <p:cNvGrpSpPr/>
+            <p:nvPr/>
+          </p:nvGrpSpPr>
+          <p:grpSpPr>
+            <a:xfrm>
+              <a:off x="5296757" y="6077632"/>
+              <a:ext cx="203896" cy="281883"/>
+              <a:chOff x="3659026" y="5581650"/>
+              <a:chExt cx="203896" cy="281883"/>
+            </a:xfrm>
+          </p:grpSpPr>
+          <p:sp>
+            <p:nvSpPr>
+              <p:cNvPr id="16" name="Rectangle 15">
+                <a:extLst>
+                  <a:ext uri="{FF2B5EF4-FFF2-40B4-BE49-F238E27FC236}">
+                    <a16:creationId xmlns:a16="http://schemas.microsoft.com/office/drawing/2014/main" id="{EC0B69FB-4D1D-1A75-79EE-090D6801312B}"/>
+                  </a:ext>
+                </a:extLst>
+              </p:cNvPr>
+              <p:cNvSpPr/>
+              <p:nvPr/>
+            </p:nvSpPr>
+            <p:spPr>
+              <a:xfrm>
+                <a:off x="3659026" y="5581650"/>
+                <a:ext cx="203896" cy="47356"/>
+              </a:xfrm>
+              <a:prstGeom prst="rect">
+                <a:avLst/>
+              </a:prstGeom>
+            </p:spPr>
+            <p:style>
+              <a:lnRef idx="2">
+                <a:schemeClr val="dk1"/>
+              </a:lnRef>
+              <a:fillRef idx="1">
+                <a:schemeClr val="lt1"/>
+              </a:fillRef>
+              <a:effectRef idx="0">
+                <a:schemeClr val="dk1"/>
+              </a:effectRef>
+              <a:fontRef idx="minor">
+                <a:schemeClr val="dk1"/>
+              </a:fontRef>
+            </p:style>
+            <p:txBody>
+              <a:bodyPr rtlCol="0" anchor="ctr"/>
+              <a:lstStyle/>
+              <a:p>
+                <a:pPr algn="ctr"/>
+                <a:endParaRPr lang="en-US"/>
+              </a:p>
+            </p:txBody>
+          </p:sp>
+          <p:sp>
+            <p:nvSpPr>
+              <p:cNvPr id="17" name="Rectangle 16">
+                <a:extLst>
+                  <a:ext uri="{FF2B5EF4-FFF2-40B4-BE49-F238E27FC236}">
+                    <a16:creationId xmlns:a16="http://schemas.microsoft.com/office/drawing/2014/main" id="{1241DB16-B822-C38D-FE31-AF61EFB23F8A}"/>
+                  </a:ext>
+                </a:extLst>
+              </p:cNvPr>
+              <p:cNvSpPr/>
+              <p:nvPr/>
+            </p:nvSpPr>
+            <p:spPr>
+              <a:xfrm>
+                <a:off x="3659026" y="5638162"/>
+                <a:ext cx="203896" cy="47356"/>
+              </a:xfrm>
+              <a:prstGeom prst="rect">
+                <a:avLst/>
+              </a:prstGeom>
+            </p:spPr>
+            <p:style>
+              <a:lnRef idx="2">
+                <a:schemeClr val="dk1"/>
+              </a:lnRef>
+              <a:fillRef idx="1">
+                <a:schemeClr val="lt1"/>
+              </a:fillRef>
+              <a:effectRef idx="0">
+                <a:schemeClr val="dk1"/>
+              </a:effectRef>
+              <a:fontRef idx="minor">
+                <a:schemeClr val="dk1"/>
+              </a:fontRef>
+            </p:style>
+            <p:txBody>
+              <a:bodyPr rtlCol="0" anchor="ctr"/>
+              <a:lstStyle/>
+              <a:p>
+                <a:pPr algn="ctr"/>
+                <a:endParaRPr lang="en-US"/>
+              </a:p>
+            </p:txBody>
+          </p:sp>
+          <p:sp>
+            <p:nvSpPr>
+              <p:cNvPr id="18" name="Rectangle 17">
+                <a:extLst>
+                  <a:ext uri="{FF2B5EF4-FFF2-40B4-BE49-F238E27FC236}">
+                    <a16:creationId xmlns:a16="http://schemas.microsoft.com/office/drawing/2014/main" id="{335667EA-7C25-92BF-052D-CD3E134AF848}"/>
+                  </a:ext>
+                </a:extLst>
+              </p:cNvPr>
+              <p:cNvSpPr/>
+              <p:nvPr/>
+            </p:nvSpPr>
+            <p:spPr>
+              <a:xfrm>
+                <a:off x="3659026" y="5694674"/>
+                <a:ext cx="203896" cy="47356"/>
+              </a:xfrm>
+              <a:prstGeom prst="rect">
+                <a:avLst/>
+              </a:prstGeom>
+            </p:spPr>
+            <p:style>
+              <a:lnRef idx="2">
+                <a:schemeClr val="dk1"/>
+              </a:lnRef>
+              <a:fillRef idx="1">
+                <a:schemeClr val="lt1"/>
+              </a:fillRef>
+              <a:effectRef idx="0">
+                <a:schemeClr val="dk1"/>
+              </a:effectRef>
+              <a:fontRef idx="minor">
+                <a:schemeClr val="dk1"/>
+              </a:fontRef>
+            </p:style>
+            <p:txBody>
+              <a:bodyPr rtlCol="0" anchor="ctr"/>
+              <a:lstStyle/>
+              <a:p>
+                <a:pPr algn="ctr"/>
+                <a:endParaRPr lang="en-US"/>
+              </a:p>
+            </p:txBody>
+          </p:sp>
+          <p:sp>
+            <p:nvSpPr>
+              <p:cNvPr id="19" name="Rectangle 18">
+                <a:extLst>
+                  <a:ext uri="{FF2B5EF4-FFF2-40B4-BE49-F238E27FC236}">
+                    <a16:creationId xmlns:a16="http://schemas.microsoft.com/office/drawing/2014/main" id="{3CBFC04C-F6FF-B9CD-BFFA-68612AA2F437}"/>
+                  </a:ext>
+                </a:extLst>
+              </p:cNvPr>
+              <p:cNvSpPr/>
+              <p:nvPr/>
+            </p:nvSpPr>
+            <p:spPr>
+              <a:xfrm>
+                <a:off x="3659026" y="5751186"/>
+                <a:ext cx="203896" cy="47356"/>
+              </a:xfrm>
+              <a:prstGeom prst="rect">
+                <a:avLst/>
+              </a:prstGeom>
+            </p:spPr>
+            <p:style>
+              <a:lnRef idx="2">
+                <a:schemeClr val="dk1"/>
+              </a:lnRef>
+              <a:fillRef idx="1">
+                <a:schemeClr val="lt1"/>
+              </a:fillRef>
+              <a:effectRef idx="0">
+                <a:schemeClr val="dk1"/>
+              </a:effectRef>
+              <a:fontRef idx="minor">
+                <a:schemeClr val="dk1"/>
+              </a:fontRef>
+            </p:style>
+            <p:txBody>
+              <a:bodyPr rtlCol="0" anchor="ctr"/>
+              <a:lstStyle/>
+              <a:p>
+                <a:pPr algn="ctr"/>
+                <a:endParaRPr lang="en-US"/>
+              </a:p>
+            </p:txBody>
+          </p:sp>
+          <p:sp>
+            <p:nvSpPr>
+              <p:cNvPr id="20" name="Rectangle 19">
+                <a:extLst>
+                  <a:ext uri="{FF2B5EF4-FFF2-40B4-BE49-F238E27FC236}">
+                    <a16:creationId xmlns:a16="http://schemas.microsoft.com/office/drawing/2014/main" id="{9A821328-4190-727E-1D72-BEF54F32EFB3}"/>
+                  </a:ext>
+                </a:extLst>
+              </p:cNvPr>
+              <p:cNvSpPr/>
+              <p:nvPr/>
+            </p:nvSpPr>
+            <p:spPr>
+              <a:xfrm>
+                <a:off x="3659026" y="5816177"/>
+                <a:ext cx="203896" cy="47356"/>
+              </a:xfrm>
+              <a:prstGeom prst="rect">
+                <a:avLst/>
+              </a:prstGeom>
+            </p:spPr>
+            <p:style>
+              <a:lnRef idx="2">
+                <a:schemeClr val="dk1"/>
+              </a:lnRef>
+              <a:fillRef idx="1">
+                <a:schemeClr val="lt1"/>
+              </a:fillRef>
+              <a:effectRef idx="0">
+                <a:schemeClr val="dk1"/>
+              </a:effectRef>
+              <a:fontRef idx="minor">
+                <a:schemeClr val="dk1"/>
+              </a:fontRef>
+            </p:style>
+            <p:txBody>
+              <a:bodyPr rtlCol="0" anchor="ctr"/>
+              <a:lstStyle/>
+              <a:p>
+                <a:pPr algn="ctr"/>
+                <a:endParaRPr lang="en-US"/>
+              </a:p>
+            </p:txBody>
+          </p:sp>
+        </p:grpSp>
+      </p:grpSp>
+      <p:sp>
+        <p:nvSpPr>
+          <p:cNvPr id="21" name="Rectangle: Rounded Corners 20">
+            <a:extLst>
+              <a:ext uri="{FF2B5EF4-FFF2-40B4-BE49-F238E27FC236}">
+                <a16:creationId xmlns:a16="http://schemas.microsoft.com/office/drawing/2014/main" id="{BFF23F1F-D479-3B5E-FB52-A9D84F74736E}"/>
+              </a:ext>
+            </a:extLst>
+          </p:cNvPr>
+          <p:cNvSpPr/>
+          <p:nvPr/>
+        </p:nvSpPr>
+        <p:spPr>
+          <a:xfrm>
+            <a:off x="10902836" y="2169024"/>
+            <a:ext cx="1016360" cy="559220"/>
+          </a:xfrm>
+          <a:prstGeom prst="roundRect">
+            <a:avLst/>
+          </a:prstGeom>
+        </p:spPr>
+        <p:style>
+          <a:lnRef idx="2">
+            <a:schemeClr val="dk1"/>
+          </a:lnRef>
+          <a:fillRef idx="1">
+            <a:schemeClr val="lt1"/>
+          </a:fillRef>
+          <a:effectRef idx="0">
+            <a:schemeClr val="dk1"/>
+          </a:effectRef>
+          <a:fontRef idx="minor">
+            <a:schemeClr val="dk1"/>
+          </a:fontRef>
+        </p:style>
+        <p:txBody>
+          <a:bodyPr rtlCol="0" anchor="ctr"/>
+          <a:lstStyle/>
+          <a:p>
+            <a:pPr algn="ctr"/>
+            <a:r>
+              <a:rPr lang="en-US"/>
+              <a:t>DIE0</a:t>
+            </a:r>
+          </a:p>
+        </p:txBody>
+      </p:sp>
+      <p:cxnSp>
+        <p:nvCxnSpPr>
+          <p:cNvPr id="22" name="Straight Arrow Connector 21">
+            <a:extLst>
+              <a:ext uri="{FF2B5EF4-FFF2-40B4-BE49-F238E27FC236}">
+                <a16:creationId xmlns:a16="http://schemas.microsoft.com/office/drawing/2014/main" id="{A6C27C05-FC6A-E29F-7AB0-F6F1861EBDA1}"/>
+              </a:ext>
+            </a:extLst>
+          </p:cNvPr>
+          <p:cNvCxnSpPr>
+            <a:cxnSpLocks/>
+            <a:stCxn id="30" idx="0"/>
+            <a:endCxn id="21" idx="1"/>
+          </p:cNvCxnSpPr>
+          <p:nvPr/>
+        </p:nvCxnSpPr>
+        <p:spPr>
+          <a:xfrm>
+            <a:off x="9115176" y="2419364"/>
+            <a:ext cx="1787660" cy="29270"/>
+          </a:xfrm>
+          <a:prstGeom prst="straightConnector1">
+            <a:avLst/>
+          </a:prstGeom>
+          <a:ln>
+            <a:tailEnd type="triangle"/>
+          </a:ln>
+        </p:spPr>
+        <p:style>
+          <a:lnRef idx="2">
+            <a:schemeClr val="accent1"/>
+          </a:lnRef>
+          <a:fillRef idx="0">
+            <a:schemeClr val="accent1"/>
+          </a:fillRef>
+          <a:effectRef idx="1">
+            <a:schemeClr val="accent1"/>
+          </a:effectRef>
+          <a:fontRef idx="minor">
+            <a:schemeClr val="tx1"/>
+          </a:fontRef>
+        </p:style>
+      </p:cxnSp>
+      <p:sp>
+        <p:nvSpPr>
+          <p:cNvPr id="23" name="TextBox 22">
+            <a:extLst>
+              <a:ext uri="{FF2B5EF4-FFF2-40B4-BE49-F238E27FC236}">
+                <a16:creationId xmlns:a16="http://schemas.microsoft.com/office/drawing/2014/main" id="{6145CB54-74B4-A661-FECB-7A344BF37305}"/>
+              </a:ext>
+            </a:extLst>
+          </p:cNvPr>
+          <p:cNvSpPr txBox="1"/>
+          <p:nvPr/>
+        </p:nvSpPr>
+        <p:spPr>
+          <a:xfrm>
+            <a:off x="2878109" y="1373589"/>
+            <a:ext cx="569387" cy="369332"/>
+          </a:xfrm>
+          <a:prstGeom prst="rect">
+            <a:avLst/>
+          </a:prstGeom>
+          <a:noFill/>
+        </p:spPr>
+        <p:txBody>
+          <a:bodyPr wrap="none" rtlCol="0">
+            <a:spAutoFit/>
+          </a:bodyPr>
+          <a:lstStyle/>
+          <a:p>
+            <a:r>
+              <a:rPr lang="en-US"/>
+              <a:t>BF6</a:t>
+            </a:r>
+          </a:p>
+        </p:txBody>
+      </p:sp>
+      <p:sp>
+        <p:nvSpPr>
+          <p:cNvPr id="24" name="Rectangle: Rounded Corners 23">
+            <a:extLst>
+              <a:ext uri="{FF2B5EF4-FFF2-40B4-BE49-F238E27FC236}">
+                <a16:creationId xmlns:a16="http://schemas.microsoft.com/office/drawing/2014/main" id="{E63A8F9B-7073-421D-16C4-6D9E6D8079AE}"/>
+              </a:ext>
+            </a:extLst>
+          </p:cNvPr>
+          <p:cNvSpPr/>
+          <p:nvPr/>
+        </p:nvSpPr>
+        <p:spPr>
+          <a:xfrm>
+            <a:off x="2662277" y="2300690"/>
+            <a:ext cx="855799" cy="263436"/>
+          </a:xfrm>
+          <a:prstGeom prst="roundRect">
+            <a:avLst/>
+          </a:prstGeom>
+          <a:noFill/>
+          <a:ln>
+            <a:solidFill>
+              <a:srgbClr val="C00000"/>
+            </a:solidFill>
+          </a:ln>
+        </p:spPr>
+        <p:style>
+          <a:lnRef idx="2">
+            <a:schemeClr val="dk1"/>
+          </a:lnRef>
+          <a:fillRef idx="1">
+            <a:schemeClr val="lt1"/>
+          </a:fillRef>
+          <a:effectRef idx="0">
+            <a:schemeClr val="dk1"/>
+          </a:effectRef>
+          <a:fontRef idx="minor">
+            <a:schemeClr val="dk1"/>
+          </a:fontRef>
+        </p:style>
+        <p:txBody>
+          <a:bodyPr rtlCol="0" anchor="ctr"/>
+          <a:lstStyle/>
+          <a:p>
+            <a:pPr algn="ctr"/>
+            <a:r>
+              <a:rPr lang="en-US"/>
+              <a:t>ARB</a:t>
+            </a:r>
+          </a:p>
+        </p:txBody>
+      </p:sp>
+      <p:cxnSp>
+        <p:nvCxnSpPr>
+          <p:cNvPr id="25" name="Straight Arrow Connector 24">
+            <a:extLst>
+              <a:ext uri="{FF2B5EF4-FFF2-40B4-BE49-F238E27FC236}">
+                <a16:creationId xmlns:a16="http://schemas.microsoft.com/office/drawing/2014/main" id="{9178EE07-E517-C86E-80A0-19231C7AF70E}"/>
+              </a:ext>
+            </a:extLst>
+          </p:cNvPr>
+          <p:cNvCxnSpPr>
+            <a:cxnSpLocks/>
+          </p:cNvCxnSpPr>
+          <p:nvPr/>
+        </p:nvCxnSpPr>
+        <p:spPr>
+          <a:xfrm>
+            <a:off x="924392" y="2435631"/>
+            <a:ext cx="929808" cy="0"/>
+          </a:xfrm>
+          <a:prstGeom prst="straightConnector1">
+            <a:avLst/>
+          </a:prstGeom>
+          <a:ln>
+            <a:tailEnd type="triangle"/>
+          </a:ln>
+        </p:spPr>
+        <p:style>
+          <a:lnRef idx="2">
+            <a:schemeClr val="accent1"/>
+          </a:lnRef>
+          <a:fillRef idx="0">
+            <a:schemeClr val="accent1"/>
+          </a:fillRef>
+          <a:effectRef idx="1">
+            <a:schemeClr val="accent1"/>
+          </a:effectRef>
+          <a:fontRef idx="minor">
+            <a:schemeClr val="tx1"/>
+          </a:fontRef>
+        </p:style>
+      </p:cxnSp>
+      <p:sp>
+        <p:nvSpPr>
+          <p:cNvPr id="26" name="TextBox 25">
+            <a:extLst>
+              <a:ext uri="{FF2B5EF4-FFF2-40B4-BE49-F238E27FC236}">
+                <a16:creationId xmlns:a16="http://schemas.microsoft.com/office/drawing/2014/main" id="{0955477D-B497-1267-5927-E357D792C0E9}"/>
+              </a:ext>
+            </a:extLst>
+          </p:cNvPr>
+          <p:cNvSpPr txBox="1"/>
+          <p:nvPr/>
+        </p:nvSpPr>
+        <p:spPr>
+          <a:xfrm>
+            <a:off x="2002055" y="1822585"/>
+            <a:ext cx="902876" cy="369332"/>
+          </a:xfrm>
+          <a:prstGeom prst="rect">
+            <a:avLst/>
+          </a:prstGeom>
+          <a:noFill/>
+        </p:spPr>
+        <p:txBody>
+          <a:bodyPr wrap="none" rtlCol="0">
+            <a:spAutoFit/>
+          </a:bodyPr>
+          <a:lstStyle/>
+          <a:p>
+            <a:r>
+              <a:rPr lang="en-US"/>
+              <a:t>Ingress</a:t>
+            </a:r>
+          </a:p>
+        </p:txBody>
+      </p:sp>
+      <p:sp>
+        <p:nvSpPr>
+          <p:cNvPr id="27" name="TextBox 26">
+            <a:extLst>
+              <a:ext uri="{FF2B5EF4-FFF2-40B4-BE49-F238E27FC236}">
+                <a16:creationId xmlns:a16="http://schemas.microsoft.com/office/drawing/2014/main" id="{07587CC7-E287-1A62-1DFF-C1C6E328D257}"/>
+              </a:ext>
+            </a:extLst>
+          </p:cNvPr>
+          <p:cNvSpPr txBox="1"/>
+          <p:nvPr/>
+        </p:nvSpPr>
+        <p:spPr>
+          <a:xfrm>
+            <a:off x="3816480" y="1761302"/>
+            <a:ext cx="838756" cy="369332"/>
+          </a:xfrm>
+          <a:prstGeom prst="rect">
+            <a:avLst/>
+          </a:prstGeom>
+          <a:noFill/>
+        </p:spPr>
+        <p:txBody>
+          <a:bodyPr wrap="none" rtlCol="0">
+            <a:spAutoFit/>
+          </a:bodyPr>
+          <a:lstStyle/>
+          <a:p>
+            <a:r>
+              <a:rPr lang="en-US"/>
+              <a:t>egress</a:t>
+            </a:r>
+          </a:p>
+        </p:txBody>
+      </p:sp>
+      <p:cxnSp>
+        <p:nvCxnSpPr>
+          <p:cNvPr id="28" name="Straight Arrow Connector 27">
+            <a:extLst>
+              <a:ext uri="{FF2B5EF4-FFF2-40B4-BE49-F238E27FC236}">
+                <a16:creationId xmlns:a16="http://schemas.microsoft.com/office/drawing/2014/main" id="{F7C94B16-D00B-2A22-D8B8-C3FDCA3E42FD}"/>
+              </a:ext>
+            </a:extLst>
+          </p:cNvPr>
+          <p:cNvCxnSpPr>
+            <a:stCxn id="10" idx="1"/>
+          </p:cNvCxnSpPr>
+          <p:nvPr/>
+        </p:nvCxnSpPr>
+        <p:spPr>
+          <a:xfrm flipV="1">
+            <a:off x="2012362" y="2054072"/>
+            <a:ext cx="89346" cy="279611"/>
+          </a:xfrm>
+          <a:prstGeom prst="straightConnector1">
+            <a:avLst/>
+          </a:prstGeom>
+          <a:ln>
+            <a:tailEnd type="triangle"/>
+          </a:ln>
+        </p:spPr>
+        <p:style>
+          <a:lnRef idx="2">
+            <a:schemeClr val="accent1"/>
+          </a:lnRef>
+          <a:fillRef idx="0">
+            <a:schemeClr val="accent1"/>
+          </a:fillRef>
+          <a:effectRef idx="1">
+            <a:schemeClr val="accent1"/>
+          </a:effectRef>
+          <a:fontRef idx="minor">
+            <a:schemeClr val="tx1"/>
+          </a:fontRef>
+        </p:style>
+      </p:cxnSp>
+      <p:cxnSp>
+        <p:nvCxnSpPr>
+          <p:cNvPr id="29" name="Straight Arrow Connector 28">
+            <a:extLst>
+              <a:ext uri="{FF2B5EF4-FFF2-40B4-BE49-F238E27FC236}">
+                <a16:creationId xmlns:a16="http://schemas.microsoft.com/office/drawing/2014/main" id="{2CE5D9F8-8C37-A214-6C64-8480AEE47CFF}"/>
+              </a:ext>
+            </a:extLst>
+          </p:cNvPr>
+          <p:cNvCxnSpPr/>
+          <p:nvPr/>
+        </p:nvCxnSpPr>
+        <p:spPr>
+          <a:xfrm flipH="1" flipV="1">
+            <a:off x="4285652" y="2007251"/>
+            <a:ext cx="136246" cy="283160"/>
+          </a:xfrm>
+          <a:prstGeom prst="straightConnector1">
+            <a:avLst/>
+          </a:prstGeom>
+          <a:ln>
+            <a:tailEnd type="triangle"/>
+          </a:ln>
+        </p:spPr>
+        <p:style>
+          <a:lnRef idx="2">
+            <a:schemeClr val="accent1"/>
+          </a:lnRef>
+          <a:fillRef idx="0">
+            <a:schemeClr val="accent1"/>
+          </a:fillRef>
+          <a:effectRef idx="1">
+            <a:schemeClr val="accent1"/>
+          </a:effectRef>
+          <a:fontRef idx="minor">
+            <a:schemeClr val="tx1"/>
+          </a:fontRef>
+        </p:style>
+      </p:cxnSp>
+      <p:sp>
+        <p:nvSpPr>
+          <p:cNvPr id="30" name="Rectangle 29">
+            <a:extLst>
+              <a:ext uri="{FF2B5EF4-FFF2-40B4-BE49-F238E27FC236}">
+                <a16:creationId xmlns:a16="http://schemas.microsoft.com/office/drawing/2014/main" id="{46A5B4BE-1C44-AE58-8787-C6BDCCD3D9BF}"/>
+              </a:ext>
+            </a:extLst>
+          </p:cNvPr>
+          <p:cNvSpPr/>
+          <p:nvPr/>
+        </p:nvSpPr>
+        <p:spPr>
+          <a:xfrm rot="5400000">
+            <a:off x="6990406" y="1026113"/>
+            <a:ext cx="1463039" cy="2786501"/>
+          </a:xfrm>
+          <a:prstGeom prst="rect">
+            <a:avLst/>
+          </a:prstGeom>
+        </p:spPr>
+        <p:style>
+          <a:lnRef idx="2">
+            <a:schemeClr val="dk1"/>
+          </a:lnRef>
+          <a:fillRef idx="1">
+            <a:schemeClr val="lt1"/>
+          </a:fillRef>
+          <a:effectRef idx="0">
+            <a:schemeClr val="dk1"/>
+          </a:effectRef>
+          <a:fontRef idx="minor">
+            <a:schemeClr val="dk1"/>
+          </a:fontRef>
+        </p:style>
+        <p:txBody>
+          <a:bodyPr rtlCol="0" anchor="ctr"/>
+          <a:lstStyle/>
+          <a:p>
+            <a:pPr algn="ctr"/>
+            <a:endParaRPr lang="en-US"/>
+          </a:p>
+        </p:txBody>
+      </p:sp>
+      <p:grpSp>
+        <p:nvGrpSpPr>
+          <p:cNvPr id="39" name="Group 38">
+            <a:extLst>
+              <a:ext uri="{FF2B5EF4-FFF2-40B4-BE49-F238E27FC236}">
+                <a16:creationId xmlns:a16="http://schemas.microsoft.com/office/drawing/2014/main" id="{066A2960-31A8-7769-F8F4-B67123269595}"/>
+              </a:ext>
+            </a:extLst>
+          </p:cNvPr>
+          <p:cNvGrpSpPr/>
+          <p:nvPr/>
+        </p:nvGrpSpPr>
+        <p:grpSpPr>
+          <a:xfrm rot="5400000">
+            <a:off x="8840643" y="2290985"/>
+            <a:ext cx="203896" cy="289293"/>
+            <a:chOff x="5296757" y="6077632"/>
+            <a:chExt cx="203896" cy="289293"/>
+          </a:xfrm>
+        </p:grpSpPr>
+        <p:sp>
+          <p:nvSpPr>
+            <p:cNvPr id="40" name="Rectangle 39">
+              <a:extLst>
+                <a:ext uri="{FF2B5EF4-FFF2-40B4-BE49-F238E27FC236}">
+                  <a16:creationId xmlns:a16="http://schemas.microsoft.com/office/drawing/2014/main" id="{EEC36FA4-CDD8-D146-64DB-BFA8F00815D8}"/>
+                </a:ext>
+              </a:extLst>
+            </p:cNvPr>
+            <p:cNvSpPr/>
+            <p:nvPr/>
+          </p:nvSpPr>
+          <p:spPr>
+            <a:xfrm>
+              <a:off x="5296757" y="6077632"/>
+              <a:ext cx="203896" cy="289293"/>
+            </a:xfrm>
+            <a:prstGeom prst="rect">
+              <a:avLst/>
+            </a:prstGeom>
+          </p:spPr>
+          <p:style>
+            <a:lnRef idx="2">
+              <a:schemeClr val="dk1"/>
+            </a:lnRef>
+            <a:fillRef idx="1">
+              <a:schemeClr val="lt1"/>
+            </a:fillRef>
+            <a:effectRef idx="0">
+              <a:schemeClr val="dk1"/>
+            </a:effectRef>
+            <a:fontRef idx="minor">
+              <a:schemeClr val="dk1"/>
+            </a:fontRef>
+          </p:style>
+          <p:txBody>
+            <a:bodyPr rtlCol="0" anchor="ctr"/>
+            <a:lstStyle/>
+            <a:p>
+              <a:pPr algn="ctr"/>
+              <a:endParaRPr lang="en-US"/>
+            </a:p>
+          </p:txBody>
+        </p:sp>
+        <p:grpSp>
+          <p:nvGrpSpPr>
+            <p:cNvPr id="41" name="Group 40">
+              <a:extLst>
+                <a:ext uri="{FF2B5EF4-FFF2-40B4-BE49-F238E27FC236}">
+                  <a16:creationId xmlns:a16="http://schemas.microsoft.com/office/drawing/2014/main" id="{F988FC8D-640B-F66B-9549-870617672A90}"/>
+                </a:ext>
+              </a:extLst>
+            </p:cNvPr>
+            <p:cNvGrpSpPr/>
+            <p:nvPr/>
+          </p:nvGrpSpPr>
+          <p:grpSpPr>
+            <a:xfrm>
+              <a:off x="5296757" y="6077632"/>
+              <a:ext cx="203896" cy="281883"/>
+              <a:chOff x="3659026" y="5581650"/>
+              <a:chExt cx="203896" cy="281883"/>
+            </a:xfrm>
+          </p:grpSpPr>
+          <p:sp>
+            <p:nvSpPr>
+              <p:cNvPr id="42" name="Rectangle 41">
+                <a:extLst>
+                  <a:ext uri="{FF2B5EF4-FFF2-40B4-BE49-F238E27FC236}">
+                    <a16:creationId xmlns:a16="http://schemas.microsoft.com/office/drawing/2014/main" id="{22FCE070-116E-680E-EA39-4B9675801EA5}"/>
+                  </a:ext>
+                </a:extLst>
+              </p:cNvPr>
+              <p:cNvSpPr/>
+              <p:nvPr/>
+            </p:nvSpPr>
+            <p:spPr>
+              <a:xfrm>
+                <a:off x="3659026" y="5581650"/>
+                <a:ext cx="203896" cy="47356"/>
+              </a:xfrm>
+              <a:prstGeom prst="rect">
+                <a:avLst/>
+              </a:prstGeom>
+            </p:spPr>
+            <p:style>
+              <a:lnRef idx="2">
+                <a:schemeClr val="dk1"/>
+              </a:lnRef>
+              <a:fillRef idx="1">
+                <a:schemeClr val="lt1"/>
+              </a:fillRef>
+              <a:effectRef idx="0">
+                <a:schemeClr val="dk1"/>
+              </a:effectRef>
+              <a:fontRef idx="minor">
+                <a:schemeClr val="dk1"/>
+              </a:fontRef>
+            </p:style>
+            <p:txBody>
+              <a:bodyPr rtlCol="0" anchor="ctr"/>
+              <a:lstStyle/>
+              <a:p>
+                <a:pPr algn="ctr"/>
+                <a:endParaRPr lang="en-US"/>
+              </a:p>
+            </p:txBody>
+          </p:sp>
+          <p:sp>
+            <p:nvSpPr>
+              <p:cNvPr id="43" name="Rectangle 42">
+                <a:extLst>
+                  <a:ext uri="{FF2B5EF4-FFF2-40B4-BE49-F238E27FC236}">
+                    <a16:creationId xmlns:a16="http://schemas.microsoft.com/office/drawing/2014/main" id="{5A0F3005-F396-4EFA-F158-7CE9A6E22896}"/>
+                  </a:ext>
+                </a:extLst>
+              </p:cNvPr>
+              <p:cNvSpPr/>
+              <p:nvPr/>
+            </p:nvSpPr>
+            <p:spPr>
+              <a:xfrm>
+                <a:off x="3659026" y="5638162"/>
+                <a:ext cx="203896" cy="47356"/>
+              </a:xfrm>
+              <a:prstGeom prst="rect">
+                <a:avLst/>
+              </a:prstGeom>
+            </p:spPr>
+            <p:style>
+              <a:lnRef idx="2">
+                <a:schemeClr val="dk1"/>
+              </a:lnRef>
+              <a:fillRef idx="1">
+                <a:schemeClr val="lt1"/>
+              </a:fillRef>
+              <a:effectRef idx="0">
+                <a:schemeClr val="dk1"/>
+              </a:effectRef>
+              <a:fontRef idx="minor">
+                <a:schemeClr val="dk1"/>
+              </a:fontRef>
+            </p:style>
+            <p:txBody>
+              <a:bodyPr rtlCol="0" anchor="ctr"/>
+              <a:lstStyle/>
+              <a:p>
+                <a:pPr algn="ctr"/>
+                <a:endParaRPr lang="en-US"/>
+              </a:p>
+            </p:txBody>
+          </p:sp>
+          <p:sp>
+            <p:nvSpPr>
+              <p:cNvPr id="44" name="Rectangle 43">
+                <a:extLst>
+                  <a:ext uri="{FF2B5EF4-FFF2-40B4-BE49-F238E27FC236}">
+                    <a16:creationId xmlns:a16="http://schemas.microsoft.com/office/drawing/2014/main" id="{7CF30D08-43EE-35AC-863C-11E99E65C2B6}"/>
+                  </a:ext>
+                </a:extLst>
+              </p:cNvPr>
+              <p:cNvSpPr/>
+              <p:nvPr/>
+            </p:nvSpPr>
+            <p:spPr>
+              <a:xfrm>
+                <a:off x="3659026" y="5694674"/>
+                <a:ext cx="203896" cy="47356"/>
+              </a:xfrm>
+              <a:prstGeom prst="rect">
+                <a:avLst/>
+              </a:prstGeom>
+            </p:spPr>
+            <p:style>
+              <a:lnRef idx="2">
+                <a:schemeClr val="dk1"/>
+              </a:lnRef>
+              <a:fillRef idx="1">
+                <a:schemeClr val="lt1"/>
+              </a:fillRef>
+              <a:effectRef idx="0">
+                <a:schemeClr val="dk1"/>
+              </a:effectRef>
+              <a:fontRef idx="minor">
+                <a:schemeClr val="dk1"/>
+              </a:fontRef>
+            </p:style>
+            <p:txBody>
+              <a:bodyPr rtlCol="0" anchor="ctr"/>
+              <a:lstStyle/>
+              <a:p>
+                <a:pPr algn="ctr"/>
+                <a:endParaRPr lang="en-US"/>
+              </a:p>
+            </p:txBody>
+          </p:sp>
+          <p:sp>
+            <p:nvSpPr>
+              <p:cNvPr id="45" name="Rectangle 44">
+                <a:extLst>
+                  <a:ext uri="{FF2B5EF4-FFF2-40B4-BE49-F238E27FC236}">
+                    <a16:creationId xmlns:a16="http://schemas.microsoft.com/office/drawing/2014/main" id="{45811F71-9603-906E-26CA-6F43EE3DEE61}"/>
+                  </a:ext>
+                </a:extLst>
+              </p:cNvPr>
+              <p:cNvSpPr/>
+              <p:nvPr/>
+            </p:nvSpPr>
+            <p:spPr>
+              <a:xfrm>
+                <a:off x="3659026" y="5751186"/>
+                <a:ext cx="203896" cy="47356"/>
+              </a:xfrm>
+              <a:prstGeom prst="rect">
+                <a:avLst/>
+              </a:prstGeom>
+            </p:spPr>
+            <p:style>
+              <a:lnRef idx="2">
+                <a:schemeClr val="dk1"/>
+              </a:lnRef>
+              <a:fillRef idx="1">
+                <a:schemeClr val="lt1"/>
+              </a:fillRef>
+              <a:effectRef idx="0">
+                <a:schemeClr val="dk1"/>
+              </a:effectRef>
+              <a:fontRef idx="minor">
+                <a:schemeClr val="dk1"/>
+              </a:fontRef>
+            </p:style>
+            <p:txBody>
+              <a:bodyPr rtlCol="0" anchor="ctr"/>
+              <a:lstStyle/>
+              <a:p>
+                <a:pPr algn="ctr"/>
+                <a:endParaRPr lang="en-US"/>
+              </a:p>
+            </p:txBody>
+          </p:sp>
+          <p:sp>
+            <p:nvSpPr>
+              <p:cNvPr id="46" name="Rectangle 45">
+                <a:extLst>
+                  <a:ext uri="{FF2B5EF4-FFF2-40B4-BE49-F238E27FC236}">
+                    <a16:creationId xmlns:a16="http://schemas.microsoft.com/office/drawing/2014/main" id="{2AAF4706-C09D-8629-70B0-9FE8CB55791E}"/>
+                  </a:ext>
+                </a:extLst>
+              </p:cNvPr>
+              <p:cNvSpPr/>
+              <p:nvPr/>
+            </p:nvSpPr>
+            <p:spPr>
+              <a:xfrm>
+                <a:off x="3659026" y="5816177"/>
+                <a:ext cx="203896" cy="47356"/>
+              </a:xfrm>
+              <a:prstGeom prst="rect">
+                <a:avLst/>
+              </a:prstGeom>
+            </p:spPr>
+            <p:style>
+              <a:lnRef idx="2">
+                <a:schemeClr val="dk1"/>
+              </a:lnRef>
+              <a:fillRef idx="1">
+                <a:schemeClr val="lt1"/>
+              </a:fillRef>
+              <a:effectRef idx="0">
+                <a:schemeClr val="dk1"/>
+              </a:effectRef>
+              <a:fontRef idx="minor">
+                <a:schemeClr val="dk1"/>
+              </a:fontRef>
+            </p:style>
+            <p:txBody>
+              <a:bodyPr rtlCol="0" anchor="ctr"/>
+              <a:lstStyle/>
+              <a:p>
+                <a:pPr algn="ctr"/>
+                <a:endParaRPr lang="en-US"/>
+              </a:p>
+            </p:txBody>
+          </p:sp>
+        </p:grpSp>
+      </p:grpSp>
+      <p:sp>
+        <p:nvSpPr>
+          <p:cNvPr id="47" name="TextBox 46">
+            <a:extLst>
+              <a:ext uri="{FF2B5EF4-FFF2-40B4-BE49-F238E27FC236}">
+                <a16:creationId xmlns:a16="http://schemas.microsoft.com/office/drawing/2014/main" id="{66187983-D9FA-3AF4-D4C8-079E35873E13}"/>
+              </a:ext>
+            </a:extLst>
+          </p:cNvPr>
+          <p:cNvSpPr txBox="1"/>
+          <p:nvPr/>
+        </p:nvSpPr>
+        <p:spPr>
+          <a:xfrm>
+            <a:off x="7131112" y="1373589"/>
+            <a:ext cx="569387" cy="369332"/>
+          </a:xfrm>
+          <a:prstGeom prst="rect">
+            <a:avLst/>
+          </a:prstGeom>
+          <a:noFill/>
+        </p:spPr>
+        <p:txBody>
+          <a:bodyPr wrap="none" rtlCol="0">
+            <a:spAutoFit/>
+          </a:bodyPr>
+          <a:lstStyle/>
+          <a:p>
+            <a:r>
+              <a:rPr lang="en-US"/>
+              <a:t>BF0</a:t>
+            </a:r>
+          </a:p>
+        </p:txBody>
+      </p:sp>
+      <p:sp>
+        <p:nvSpPr>
+          <p:cNvPr id="48" name="Rectangle: Rounded Corners 47">
+            <a:extLst>
+              <a:ext uri="{FF2B5EF4-FFF2-40B4-BE49-F238E27FC236}">
+                <a16:creationId xmlns:a16="http://schemas.microsoft.com/office/drawing/2014/main" id="{B5CB1775-0C16-F78C-420F-502FF1F74D75}"/>
+              </a:ext>
+            </a:extLst>
+          </p:cNvPr>
+          <p:cNvSpPr/>
+          <p:nvPr/>
+        </p:nvSpPr>
+        <p:spPr>
+          <a:xfrm>
+            <a:off x="7131112" y="2290411"/>
+            <a:ext cx="855799" cy="263436"/>
+          </a:xfrm>
+          <a:prstGeom prst="roundRect">
+            <a:avLst/>
+          </a:prstGeom>
+          <a:noFill/>
+          <a:ln>
+            <a:solidFill>
+              <a:srgbClr val="C00000"/>
+            </a:solidFill>
+          </a:ln>
+        </p:spPr>
+        <p:style>
+          <a:lnRef idx="2">
+            <a:schemeClr val="dk1"/>
+          </a:lnRef>
+          <a:fillRef idx="1">
+            <a:schemeClr val="lt1"/>
+          </a:fillRef>
+          <a:effectRef idx="0">
+            <a:schemeClr val="dk1"/>
+          </a:effectRef>
+          <a:fontRef idx="minor">
+            <a:schemeClr val="dk1"/>
+          </a:fontRef>
+        </p:style>
+        <p:txBody>
+          <a:bodyPr rtlCol="0" anchor="ctr"/>
+          <a:lstStyle/>
+          <a:p>
+            <a:pPr algn="ctr"/>
+            <a:r>
+              <a:rPr lang="en-US"/>
+              <a:t>ARB</a:t>
+            </a:r>
+          </a:p>
+        </p:txBody>
+      </p:sp>
+      <p:sp>
+        <p:nvSpPr>
+          <p:cNvPr id="50" name="TextBox 49">
+            <a:extLst>
+              <a:ext uri="{FF2B5EF4-FFF2-40B4-BE49-F238E27FC236}">
+                <a16:creationId xmlns:a16="http://schemas.microsoft.com/office/drawing/2014/main" id="{25F85AAF-140A-F108-6FF8-33C1E2E04F02}"/>
+              </a:ext>
+            </a:extLst>
+          </p:cNvPr>
+          <p:cNvSpPr txBox="1"/>
+          <p:nvPr/>
+        </p:nvSpPr>
+        <p:spPr>
+          <a:xfrm>
+            <a:off x="8069483" y="1761302"/>
+            <a:ext cx="838756" cy="369332"/>
+          </a:xfrm>
+          <a:prstGeom prst="rect">
+            <a:avLst/>
+          </a:prstGeom>
+          <a:noFill/>
+        </p:spPr>
+        <p:txBody>
+          <a:bodyPr wrap="none" rtlCol="0">
+            <a:spAutoFit/>
+          </a:bodyPr>
+          <a:lstStyle/>
+          <a:p>
+            <a:r>
+              <a:rPr lang="en-US"/>
+              <a:t>egress</a:t>
+            </a:r>
+          </a:p>
+        </p:txBody>
+      </p:sp>
+      <p:cxnSp>
+        <p:nvCxnSpPr>
+          <p:cNvPr id="52" name="Straight Arrow Connector 51">
+            <a:extLst>
+              <a:ext uri="{FF2B5EF4-FFF2-40B4-BE49-F238E27FC236}">
+                <a16:creationId xmlns:a16="http://schemas.microsoft.com/office/drawing/2014/main" id="{169CE83C-BDBC-5617-C713-FB703213BE9B}"/>
+              </a:ext>
+            </a:extLst>
+          </p:cNvPr>
+          <p:cNvCxnSpPr/>
+          <p:nvPr/>
+        </p:nvCxnSpPr>
+        <p:spPr>
+          <a:xfrm flipH="1" flipV="1">
+            <a:off x="8652955" y="2045351"/>
+            <a:ext cx="136246" cy="283160"/>
+          </a:xfrm>
+          <a:prstGeom prst="straightConnector1">
+            <a:avLst/>
+          </a:prstGeom>
+          <a:ln>
+            <a:tailEnd type="triangle"/>
+          </a:ln>
+        </p:spPr>
+        <p:style>
+          <a:lnRef idx="2">
+            <a:schemeClr val="accent1"/>
+          </a:lnRef>
+          <a:fillRef idx="0">
+            <a:schemeClr val="accent1"/>
+          </a:fillRef>
+          <a:effectRef idx="1">
+            <a:schemeClr val="accent1"/>
+          </a:effectRef>
+          <a:fontRef idx="minor">
+            <a:schemeClr val="tx1"/>
+          </a:fontRef>
+        </p:style>
+      </p:cxnSp>
+      <p:cxnSp>
+        <p:nvCxnSpPr>
+          <p:cNvPr id="53" name="Straight Arrow Connector 52">
+            <a:extLst>
+              <a:ext uri="{FF2B5EF4-FFF2-40B4-BE49-F238E27FC236}">
+                <a16:creationId xmlns:a16="http://schemas.microsoft.com/office/drawing/2014/main" id="{AE167456-35AD-3478-AA53-AB7AB48CC6EE}"/>
+              </a:ext>
+            </a:extLst>
+          </p:cNvPr>
+          <p:cNvCxnSpPr>
+            <a:cxnSpLocks/>
+          </p:cNvCxnSpPr>
+          <p:nvPr/>
+        </p:nvCxnSpPr>
+        <p:spPr>
+          <a:xfrm flipV="1">
+            <a:off x="4567535" y="2410244"/>
+            <a:ext cx="2563577" cy="25387"/>
+          </a:xfrm>
+          <a:prstGeom prst="straightConnector1">
+            <a:avLst/>
+          </a:prstGeom>
+          <a:ln>
+            <a:tailEnd type="triangle"/>
+          </a:ln>
+        </p:spPr>
+        <p:style>
+          <a:lnRef idx="2">
+            <a:schemeClr val="accent1"/>
+          </a:lnRef>
+          <a:fillRef idx="0">
+            <a:schemeClr val="accent1"/>
+          </a:fillRef>
+          <a:effectRef idx="1">
+            <a:schemeClr val="accent1"/>
+          </a:effectRef>
+          <a:fontRef idx="minor">
+            <a:schemeClr val="tx1"/>
+          </a:fontRef>
+        </p:style>
+      </p:cxnSp>
+      <p:sp>
+        <p:nvSpPr>
+          <p:cNvPr id="54" name="TextBox 53">
+            <a:extLst>
+              <a:ext uri="{FF2B5EF4-FFF2-40B4-BE49-F238E27FC236}">
+                <a16:creationId xmlns:a16="http://schemas.microsoft.com/office/drawing/2014/main" id="{4B857D49-31B9-3686-D46D-A5C781C2ED39}"/>
+              </a:ext>
+            </a:extLst>
+          </p:cNvPr>
+          <p:cNvSpPr txBox="1"/>
+          <p:nvPr/>
+        </p:nvSpPr>
+        <p:spPr>
+          <a:xfrm>
+            <a:off x="4876486" y="4032162"/>
+            <a:ext cx="2757144" cy="369332"/>
+          </a:xfrm>
+          <a:prstGeom prst="rect">
+            <a:avLst/>
+          </a:prstGeom>
+          <a:noFill/>
+        </p:spPr>
+        <p:txBody>
+          <a:bodyPr wrap="square">
+            <a:spAutoFit/>
+          </a:bodyPr>
+          <a:lstStyle/>
+          <a:p>
+            <a:r>
+              <a:rPr lang="en-US"/>
+              <a:t>Avg Latency = 59cyl</a:t>
+            </a:r>
+          </a:p>
+        </p:txBody>
+      </p:sp>
+      <p:cxnSp>
+        <p:nvCxnSpPr>
+          <p:cNvPr id="55" name="Straight Arrow Connector 54">
+            <a:extLst>
+              <a:ext uri="{FF2B5EF4-FFF2-40B4-BE49-F238E27FC236}">
+                <a16:creationId xmlns:a16="http://schemas.microsoft.com/office/drawing/2014/main" id="{F16903D6-7BE2-6F1B-8E71-396614D94B1F}"/>
+              </a:ext>
+            </a:extLst>
+          </p:cNvPr>
+          <p:cNvCxnSpPr>
+            <a:cxnSpLocks/>
+          </p:cNvCxnSpPr>
+          <p:nvPr/>
+        </p:nvCxnSpPr>
+        <p:spPr>
+          <a:xfrm>
+            <a:off x="2002055" y="3977270"/>
+            <a:ext cx="8645890" cy="0"/>
+          </a:xfrm>
+          <a:prstGeom prst="straightConnector1">
+            <a:avLst/>
+          </a:prstGeom>
+          <a:ln w="38100">
+            <a:tailEnd type="triangle"/>
+          </a:ln>
+        </p:spPr>
+        <p:style>
+          <a:lnRef idx="2">
+            <a:schemeClr val="accent1"/>
+          </a:lnRef>
+          <a:fillRef idx="0">
+            <a:schemeClr val="accent1"/>
+          </a:fillRef>
+          <a:effectRef idx="1">
+            <a:schemeClr val="accent1"/>
+          </a:effectRef>
+          <a:fontRef idx="minor">
+            <a:schemeClr val="tx1"/>
+          </a:fontRef>
+        </p:style>
+      </p:cxnSp>
+      <p:cxnSp>
+        <p:nvCxnSpPr>
+          <p:cNvPr id="56" name="Straight Connector 55">
+            <a:extLst>
+              <a:ext uri="{FF2B5EF4-FFF2-40B4-BE49-F238E27FC236}">
+                <a16:creationId xmlns:a16="http://schemas.microsoft.com/office/drawing/2014/main" id="{E5221EFA-65EE-911D-F89F-293112BF9B1C}"/>
+              </a:ext>
+            </a:extLst>
+          </p:cNvPr>
+          <p:cNvCxnSpPr/>
+          <p:nvPr/>
+        </p:nvCxnSpPr>
+        <p:spPr>
+          <a:xfrm>
+            <a:off x="4791070" y="1288488"/>
+            <a:ext cx="0" cy="3330341"/>
+          </a:xfrm>
+          <a:prstGeom prst="line">
+            <a:avLst/>
+          </a:prstGeom>
+          <a:ln>
+            <a:prstDash val="dash"/>
+          </a:ln>
+        </p:spPr>
+        <p:style>
+          <a:lnRef idx="2">
+            <a:schemeClr val="accent1"/>
+          </a:lnRef>
+          <a:fillRef idx="0">
+            <a:schemeClr val="accent1"/>
+          </a:fillRef>
+          <a:effectRef idx="1">
+            <a:schemeClr val="accent1"/>
+          </a:effectRef>
+          <a:fontRef idx="minor">
+            <a:schemeClr val="tx1"/>
+          </a:fontRef>
+        </p:style>
+      </p:cxnSp>
+      <p:cxnSp>
+        <p:nvCxnSpPr>
+          <p:cNvPr id="57" name="Straight Connector 56">
+            <a:extLst>
+              <a:ext uri="{FF2B5EF4-FFF2-40B4-BE49-F238E27FC236}">
+                <a16:creationId xmlns:a16="http://schemas.microsoft.com/office/drawing/2014/main" id="{725FAA7E-FE74-D716-366A-CBB719581A41}"/>
+              </a:ext>
+            </a:extLst>
+          </p:cNvPr>
+          <p:cNvCxnSpPr/>
+          <p:nvPr/>
+        </p:nvCxnSpPr>
+        <p:spPr>
+          <a:xfrm>
+            <a:off x="10647945" y="1288488"/>
+            <a:ext cx="0" cy="3330341"/>
+          </a:xfrm>
+          <a:prstGeom prst="line">
+            <a:avLst/>
+          </a:prstGeom>
+          <a:ln>
+            <a:prstDash val="dash"/>
+          </a:ln>
+        </p:spPr>
+        <p:style>
+          <a:lnRef idx="2">
+            <a:schemeClr val="accent1"/>
+          </a:lnRef>
+          <a:fillRef idx="0">
+            <a:schemeClr val="accent1"/>
+          </a:fillRef>
+          <a:effectRef idx="1">
+            <a:schemeClr val="accent1"/>
+          </a:effectRef>
+          <a:fontRef idx="minor">
+            <a:schemeClr val="tx1"/>
+          </a:fontRef>
+        </p:style>
+      </p:cxnSp>
+      <p:cxnSp>
+        <p:nvCxnSpPr>
+          <p:cNvPr id="58" name="Straight Arrow Connector 57">
+            <a:extLst>
+              <a:ext uri="{FF2B5EF4-FFF2-40B4-BE49-F238E27FC236}">
+                <a16:creationId xmlns:a16="http://schemas.microsoft.com/office/drawing/2014/main" id="{21813FC4-6CC4-6B69-C4A9-96CB4EFC258D}"/>
+              </a:ext>
+            </a:extLst>
+          </p:cNvPr>
+          <p:cNvCxnSpPr>
+            <a:cxnSpLocks/>
+          </p:cNvCxnSpPr>
+          <p:nvPr/>
+        </p:nvCxnSpPr>
+        <p:spPr>
+          <a:xfrm>
+            <a:off x="6217920" y="3300305"/>
+            <a:ext cx="2786504" cy="0"/>
+          </a:xfrm>
+          <a:prstGeom prst="straightConnector1">
+            <a:avLst/>
+          </a:prstGeom>
+          <a:ln w="38100">
+            <a:tailEnd type="triangle"/>
+          </a:ln>
+        </p:spPr>
+        <p:style>
+          <a:lnRef idx="2">
+            <a:schemeClr val="accent1"/>
+          </a:lnRef>
+          <a:fillRef idx="0">
+            <a:schemeClr val="accent1"/>
+          </a:fillRef>
+          <a:effectRef idx="1">
+            <a:schemeClr val="accent1"/>
+          </a:effectRef>
+          <a:fontRef idx="minor">
+            <a:schemeClr val="tx1"/>
+          </a:fontRef>
+        </p:style>
+      </p:cxnSp>
+      <p:cxnSp>
+        <p:nvCxnSpPr>
+          <p:cNvPr id="59" name="Straight Arrow Connector 58">
+            <a:extLst>
+              <a:ext uri="{FF2B5EF4-FFF2-40B4-BE49-F238E27FC236}">
+                <a16:creationId xmlns:a16="http://schemas.microsoft.com/office/drawing/2014/main" id="{48FAE374-C06D-3F15-0555-15FC29D4B59D}"/>
+              </a:ext>
+            </a:extLst>
+          </p:cNvPr>
+          <p:cNvCxnSpPr>
+            <a:cxnSpLocks/>
+          </p:cNvCxnSpPr>
+          <p:nvPr/>
+        </p:nvCxnSpPr>
+        <p:spPr>
+          <a:xfrm>
+            <a:off x="4791070" y="3300305"/>
+            <a:ext cx="1388349" cy="0"/>
+          </a:xfrm>
+          <a:prstGeom prst="straightConnector1">
+            <a:avLst/>
+          </a:prstGeom>
+          <a:ln w="38100">
+            <a:tailEnd type="triangle"/>
+          </a:ln>
+        </p:spPr>
+        <p:style>
+          <a:lnRef idx="2">
+            <a:schemeClr val="accent1"/>
+          </a:lnRef>
+          <a:fillRef idx="0">
+            <a:schemeClr val="accent1"/>
+          </a:fillRef>
+          <a:effectRef idx="1">
+            <a:schemeClr val="accent1"/>
+          </a:effectRef>
+          <a:fontRef idx="minor">
+            <a:schemeClr val="tx1"/>
+          </a:fontRef>
+        </p:style>
+      </p:cxnSp>
+      <p:cxnSp>
+        <p:nvCxnSpPr>
+          <p:cNvPr id="60" name="Straight Arrow Connector 59">
+            <a:extLst>
+              <a:ext uri="{FF2B5EF4-FFF2-40B4-BE49-F238E27FC236}">
+                <a16:creationId xmlns:a16="http://schemas.microsoft.com/office/drawing/2014/main" id="{B9B5CA8A-0B7B-091F-F549-BD4B247D3030}"/>
+              </a:ext>
+            </a:extLst>
+          </p:cNvPr>
+          <p:cNvCxnSpPr>
+            <a:cxnSpLocks/>
+          </p:cNvCxnSpPr>
+          <p:nvPr/>
+        </p:nvCxnSpPr>
+        <p:spPr>
+          <a:xfrm>
+            <a:off x="9415769" y="3300305"/>
+            <a:ext cx="1244876" cy="0"/>
+          </a:xfrm>
+          <a:prstGeom prst="straightConnector1">
+            <a:avLst/>
+          </a:prstGeom>
+          <a:ln w="38100">
+            <a:tailEnd type="triangle"/>
+          </a:ln>
+        </p:spPr>
+        <p:style>
+          <a:lnRef idx="2">
+            <a:schemeClr val="accent1"/>
+          </a:lnRef>
+          <a:fillRef idx="0">
+            <a:schemeClr val="accent1"/>
+          </a:fillRef>
+          <a:effectRef idx="1">
+            <a:schemeClr val="accent1"/>
+          </a:effectRef>
+          <a:fontRef idx="minor">
+            <a:schemeClr val="tx1"/>
+          </a:fontRef>
+        </p:style>
+      </p:cxnSp>
+      <p:sp>
+        <p:nvSpPr>
+          <p:cNvPr id="61" name="TextBox 60">
+            <a:extLst>
+              <a:ext uri="{FF2B5EF4-FFF2-40B4-BE49-F238E27FC236}">
+                <a16:creationId xmlns:a16="http://schemas.microsoft.com/office/drawing/2014/main" id="{19ED8DEF-4A26-0E34-187B-D72B36BF5A5E}"/>
+              </a:ext>
+            </a:extLst>
+          </p:cNvPr>
+          <p:cNvSpPr txBox="1"/>
+          <p:nvPr/>
+        </p:nvSpPr>
+        <p:spPr>
+          <a:xfrm>
+            <a:off x="5135789" y="3327296"/>
+            <a:ext cx="786063" cy="369332"/>
+          </a:xfrm>
+          <a:prstGeom prst="rect">
+            <a:avLst/>
+          </a:prstGeom>
+          <a:noFill/>
+        </p:spPr>
+        <p:txBody>
+          <a:bodyPr wrap="square" rtlCol="0">
+            <a:spAutoFit/>
+          </a:bodyPr>
+          <a:lstStyle/>
+          <a:p>
+            <a:r>
+              <a:rPr lang="en-US"/>
+              <a:t>10cyl</a:t>
+            </a:r>
+          </a:p>
+        </p:txBody>
+      </p:sp>
+      <p:cxnSp>
+        <p:nvCxnSpPr>
+          <p:cNvPr id="62" name="Straight Connector 61">
+            <a:extLst>
+              <a:ext uri="{FF2B5EF4-FFF2-40B4-BE49-F238E27FC236}">
+                <a16:creationId xmlns:a16="http://schemas.microsoft.com/office/drawing/2014/main" id="{FC5B74BF-AE28-41F8-D6A6-637AEAB4166C}"/>
+              </a:ext>
+            </a:extLst>
+          </p:cNvPr>
+          <p:cNvCxnSpPr/>
+          <p:nvPr/>
+        </p:nvCxnSpPr>
+        <p:spPr>
+          <a:xfrm>
+            <a:off x="6166406" y="1288489"/>
+            <a:ext cx="0" cy="3330341"/>
+          </a:xfrm>
+          <a:prstGeom prst="line">
+            <a:avLst/>
+          </a:prstGeom>
+          <a:ln>
+            <a:prstDash val="dash"/>
+          </a:ln>
+        </p:spPr>
+        <p:style>
+          <a:lnRef idx="2">
+            <a:schemeClr val="accent1"/>
+          </a:lnRef>
+          <a:fillRef idx="0">
+            <a:schemeClr val="accent1"/>
+          </a:fillRef>
+          <a:effectRef idx="1">
+            <a:schemeClr val="accent1"/>
+          </a:effectRef>
+          <a:fontRef idx="minor">
+            <a:schemeClr val="tx1"/>
+          </a:fontRef>
+        </p:style>
+      </p:cxnSp>
+      <p:sp>
+        <p:nvSpPr>
+          <p:cNvPr id="63" name="TextBox 62">
+            <a:extLst>
+              <a:ext uri="{FF2B5EF4-FFF2-40B4-BE49-F238E27FC236}">
+                <a16:creationId xmlns:a16="http://schemas.microsoft.com/office/drawing/2014/main" id="{953B4615-39C7-03B9-668C-1C22F0861CBB}"/>
+              </a:ext>
+            </a:extLst>
+          </p:cNvPr>
+          <p:cNvSpPr txBox="1"/>
+          <p:nvPr/>
+        </p:nvSpPr>
+        <p:spPr>
+          <a:xfrm>
+            <a:off x="6380664" y="3309499"/>
+            <a:ext cx="2444323" cy="369332"/>
+          </a:xfrm>
+          <a:prstGeom prst="rect">
+            <a:avLst/>
+          </a:prstGeom>
+          <a:noFill/>
+        </p:spPr>
+        <p:txBody>
+          <a:bodyPr wrap="none" rtlCol="0">
+            <a:spAutoFit/>
+          </a:bodyPr>
+          <a:lstStyle/>
+          <a:p>
+            <a:r>
+              <a:rPr lang="en-US"/>
+              <a:t>1+1+3+3+1+3+3=15cyl</a:t>
+            </a:r>
+          </a:p>
+        </p:txBody>
+      </p:sp>
+      <p:sp>
+        <p:nvSpPr>
+          <p:cNvPr id="64" name="TextBox 63">
+            <a:extLst>
+              <a:ext uri="{FF2B5EF4-FFF2-40B4-BE49-F238E27FC236}">
+                <a16:creationId xmlns:a16="http://schemas.microsoft.com/office/drawing/2014/main" id="{97D94992-DF8E-108F-79C5-455CC9DDFBBC}"/>
+              </a:ext>
+            </a:extLst>
+          </p:cNvPr>
+          <p:cNvSpPr txBox="1"/>
+          <p:nvPr/>
+        </p:nvSpPr>
+        <p:spPr>
+          <a:xfrm>
+            <a:off x="9291652" y="3346035"/>
+            <a:ext cx="1426416" cy="369332"/>
+          </a:xfrm>
+          <a:prstGeom prst="rect">
+            <a:avLst/>
+          </a:prstGeom>
+          <a:noFill/>
+        </p:spPr>
+        <p:txBody>
+          <a:bodyPr wrap="none" rtlCol="0">
+            <a:spAutoFit/>
+          </a:bodyPr>
+          <a:lstStyle/>
+          <a:p>
+            <a:r>
+              <a:rPr lang="en-US"/>
+              <a:t>17+2 = 19cyl</a:t>
+            </a:r>
+          </a:p>
+        </p:txBody>
+      </p:sp>
+      <p:cxnSp>
+        <p:nvCxnSpPr>
+          <p:cNvPr id="65" name="Straight Connector 64">
+            <a:extLst>
+              <a:ext uri="{FF2B5EF4-FFF2-40B4-BE49-F238E27FC236}">
+                <a16:creationId xmlns:a16="http://schemas.microsoft.com/office/drawing/2014/main" id="{9090A5F9-E3C8-FBEB-5C13-F9765D865703}"/>
+              </a:ext>
+            </a:extLst>
+          </p:cNvPr>
+          <p:cNvCxnSpPr/>
+          <p:nvPr/>
+        </p:nvCxnSpPr>
+        <p:spPr>
+          <a:xfrm>
+            <a:off x="9317176" y="1288488"/>
+            <a:ext cx="0" cy="3330341"/>
+          </a:xfrm>
+          <a:prstGeom prst="line">
+            <a:avLst/>
+          </a:prstGeom>
+          <a:ln>
+            <a:prstDash val="dash"/>
+          </a:ln>
+        </p:spPr>
+        <p:style>
+          <a:lnRef idx="2">
+            <a:schemeClr val="accent1"/>
+          </a:lnRef>
+          <a:fillRef idx="0">
+            <a:schemeClr val="accent1"/>
+          </a:fillRef>
+          <a:effectRef idx="1">
+            <a:schemeClr val="accent1"/>
+          </a:effectRef>
+          <a:fontRef idx="minor">
+            <a:schemeClr val="tx1"/>
+          </a:fontRef>
+        </p:style>
+      </p:cxnSp>
+      <p:cxnSp>
+        <p:nvCxnSpPr>
+          <p:cNvPr id="66" name="Straight Arrow Connector 65">
+            <a:extLst>
+              <a:ext uri="{FF2B5EF4-FFF2-40B4-BE49-F238E27FC236}">
+                <a16:creationId xmlns:a16="http://schemas.microsoft.com/office/drawing/2014/main" id="{E112CB74-FBB4-776B-D811-F8AA490E9D42}"/>
+              </a:ext>
+            </a:extLst>
+          </p:cNvPr>
+          <p:cNvCxnSpPr>
+            <a:cxnSpLocks/>
+          </p:cNvCxnSpPr>
+          <p:nvPr/>
+        </p:nvCxnSpPr>
+        <p:spPr>
+          <a:xfrm>
+            <a:off x="2024396" y="3312863"/>
+            <a:ext cx="2786504" cy="0"/>
+          </a:xfrm>
+          <a:prstGeom prst="straightConnector1">
+            <a:avLst/>
+          </a:prstGeom>
+          <a:ln w="38100">
+            <a:tailEnd type="triangle"/>
+          </a:ln>
+        </p:spPr>
+        <p:style>
+          <a:lnRef idx="2">
+            <a:schemeClr val="accent1"/>
+          </a:lnRef>
+          <a:fillRef idx="0">
+            <a:schemeClr val="accent1"/>
+          </a:fillRef>
+          <a:effectRef idx="1">
+            <a:schemeClr val="accent1"/>
+          </a:effectRef>
+          <a:fontRef idx="minor">
+            <a:schemeClr val="tx1"/>
+          </a:fontRef>
+        </p:style>
+      </p:cxnSp>
+      <p:cxnSp>
+        <p:nvCxnSpPr>
+          <p:cNvPr id="67" name="Straight Connector 66">
+            <a:extLst>
+              <a:ext uri="{FF2B5EF4-FFF2-40B4-BE49-F238E27FC236}">
+                <a16:creationId xmlns:a16="http://schemas.microsoft.com/office/drawing/2014/main" id="{CE5070F6-B0DD-B515-44CF-C2DFB8A25285}"/>
+              </a:ext>
+            </a:extLst>
+          </p:cNvPr>
+          <p:cNvCxnSpPr/>
+          <p:nvPr/>
+        </p:nvCxnSpPr>
+        <p:spPr>
+          <a:xfrm>
+            <a:off x="1579540" y="1373589"/>
+            <a:ext cx="0" cy="3330341"/>
+          </a:xfrm>
+          <a:prstGeom prst="line">
+            <a:avLst/>
+          </a:prstGeom>
+          <a:ln>
+            <a:prstDash val="dash"/>
+          </a:ln>
+        </p:spPr>
+        <p:style>
+          <a:lnRef idx="2">
+            <a:schemeClr val="accent1"/>
+          </a:lnRef>
+          <a:fillRef idx="0">
+            <a:schemeClr val="accent1"/>
+          </a:fillRef>
+          <a:effectRef idx="1">
+            <a:schemeClr val="accent1"/>
+          </a:effectRef>
+          <a:fontRef idx="minor">
+            <a:schemeClr val="tx1"/>
+          </a:fontRef>
+        </p:style>
+      </p:cxnSp>
+      <p:sp>
+        <p:nvSpPr>
+          <p:cNvPr id="68" name="TextBox 67">
+            <a:extLst>
+              <a:ext uri="{FF2B5EF4-FFF2-40B4-BE49-F238E27FC236}">
+                <a16:creationId xmlns:a16="http://schemas.microsoft.com/office/drawing/2014/main" id="{F03A9AD5-B0E1-79DB-5300-2D6C70535773}"/>
+              </a:ext>
+            </a:extLst>
+          </p:cNvPr>
+          <p:cNvSpPr txBox="1"/>
+          <p:nvPr/>
+        </p:nvSpPr>
+        <p:spPr>
+          <a:xfrm>
+            <a:off x="2187140" y="3322057"/>
+            <a:ext cx="2444323" cy="369332"/>
+          </a:xfrm>
+          <a:prstGeom prst="rect">
+            <a:avLst/>
+          </a:prstGeom>
+          <a:noFill/>
+        </p:spPr>
+        <p:txBody>
+          <a:bodyPr wrap="none" rtlCol="0">
+            <a:spAutoFit/>
+          </a:bodyPr>
+          <a:lstStyle/>
+          <a:p>
+            <a:r>
+              <a:rPr lang="en-US"/>
+              <a:t>1+1+3+3+1+3+3=15cyl</a:t>
+            </a:r>
+          </a:p>
+        </p:txBody>
+      </p:sp>
+      <p:grpSp>
+        <p:nvGrpSpPr>
+          <p:cNvPr id="69" name="Group 68">
+            <a:extLst>
+              <a:ext uri="{FF2B5EF4-FFF2-40B4-BE49-F238E27FC236}">
+                <a16:creationId xmlns:a16="http://schemas.microsoft.com/office/drawing/2014/main" id="{0C25920A-D4E4-1CC2-D7E7-8DDEE9668AE4}"/>
+              </a:ext>
+            </a:extLst>
+          </p:cNvPr>
+          <p:cNvGrpSpPr/>
+          <p:nvPr/>
+        </p:nvGrpSpPr>
+        <p:grpSpPr>
+          <a:xfrm rot="5400000">
+            <a:off x="6367807" y="2738595"/>
+            <a:ext cx="203896" cy="289293"/>
+            <a:chOff x="5296757" y="6077632"/>
+            <a:chExt cx="203896" cy="289293"/>
+          </a:xfrm>
+        </p:grpSpPr>
+        <p:sp>
+          <p:nvSpPr>
+            <p:cNvPr id="70" name="Rectangle 69">
+              <a:extLst>
+                <a:ext uri="{FF2B5EF4-FFF2-40B4-BE49-F238E27FC236}">
+                  <a16:creationId xmlns:a16="http://schemas.microsoft.com/office/drawing/2014/main" id="{D34B4F7D-CA2C-5C78-6C1C-5966A40520D0}"/>
+                </a:ext>
+              </a:extLst>
+            </p:cNvPr>
+            <p:cNvSpPr/>
+            <p:nvPr/>
+          </p:nvSpPr>
+          <p:spPr>
+            <a:xfrm>
+              <a:off x="5296757" y="6077632"/>
+              <a:ext cx="203896" cy="289293"/>
+            </a:xfrm>
+            <a:prstGeom prst="rect">
+              <a:avLst/>
+            </a:prstGeom>
+          </p:spPr>
+          <p:style>
+            <a:lnRef idx="2">
+              <a:schemeClr val="dk1"/>
+            </a:lnRef>
+            <a:fillRef idx="1">
+              <a:schemeClr val="lt1"/>
+            </a:fillRef>
+            <a:effectRef idx="0">
+              <a:schemeClr val="dk1"/>
+            </a:effectRef>
+            <a:fontRef idx="minor">
+              <a:schemeClr val="dk1"/>
+            </a:fontRef>
+          </p:style>
+          <p:txBody>
+            <a:bodyPr rtlCol="0" anchor="ctr"/>
+            <a:lstStyle/>
+            <a:p>
+              <a:pPr algn="ctr"/>
+              <a:endParaRPr lang="en-US"/>
+            </a:p>
+          </p:txBody>
+        </p:sp>
+        <p:grpSp>
+          <p:nvGrpSpPr>
+            <p:cNvPr id="71" name="Group 70">
+              <a:extLst>
+                <a:ext uri="{FF2B5EF4-FFF2-40B4-BE49-F238E27FC236}">
+                  <a16:creationId xmlns:a16="http://schemas.microsoft.com/office/drawing/2014/main" id="{5A8E56AA-C5C3-F83A-49FD-E29148DAEBB2}"/>
+                </a:ext>
+              </a:extLst>
+            </p:cNvPr>
+            <p:cNvGrpSpPr/>
+            <p:nvPr/>
+          </p:nvGrpSpPr>
+          <p:grpSpPr>
+            <a:xfrm>
+              <a:off x="5296757" y="6077632"/>
+              <a:ext cx="203896" cy="281883"/>
+              <a:chOff x="3659026" y="5581650"/>
+              <a:chExt cx="203896" cy="281883"/>
+            </a:xfrm>
+          </p:grpSpPr>
+          <p:sp>
+            <p:nvSpPr>
+              <p:cNvPr id="72" name="Rectangle 71">
+                <a:extLst>
+                  <a:ext uri="{FF2B5EF4-FFF2-40B4-BE49-F238E27FC236}">
+                    <a16:creationId xmlns:a16="http://schemas.microsoft.com/office/drawing/2014/main" id="{8B11EC57-4CC5-D8DD-2126-4FFEFF887B88}"/>
+                  </a:ext>
+                </a:extLst>
+              </p:cNvPr>
+              <p:cNvSpPr/>
+              <p:nvPr/>
+            </p:nvSpPr>
+            <p:spPr>
+              <a:xfrm>
+                <a:off x="3659026" y="5581650"/>
+                <a:ext cx="203896" cy="47356"/>
+              </a:xfrm>
+              <a:prstGeom prst="rect">
+                <a:avLst/>
+              </a:prstGeom>
+            </p:spPr>
+            <p:style>
+              <a:lnRef idx="2">
+                <a:schemeClr val="dk1"/>
+              </a:lnRef>
+              <a:fillRef idx="1">
+                <a:schemeClr val="lt1"/>
+              </a:fillRef>
+              <a:effectRef idx="0">
+                <a:schemeClr val="dk1"/>
+              </a:effectRef>
+              <a:fontRef idx="minor">
+                <a:schemeClr val="dk1"/>
+              </a:fontRef>
+            </p:style>
+            <p:txBody>
+              <a:bodyPr rtlCol="0" anchor="ctr"/>
+              <a:lstStyle/>
+              <a:p>
+                <a:pPr algn="ctr"/>
+                <a:endParaRPr lang="en-US"/>
+              </a:p>
+            </p:txBody>
+          </p:sp>
+          <p:sp>
+            <p:nvSpPr>
+              <p:cNvPr id="73" name="Rectangle 72">
+                <a:extLst>
+                  <a:ext uri="{FF2B5EF4-FFF2-40B4-BE49-F238E27FC236}">
+                    <a16:creationId xmlns:a16="http://schemas.microsoft.com/office/drawing/2014/main" id="{392CE81A-7E47-F4ED-4860-4E1B75AD1873}"/>
+                  </a:ext>
+                </a:extLst>
+              </p:cNvPr>
+              <p:cNvSpPr/>
+              <p:nvPr/>
+            </p:nvSpPr>
+            <p:spPr>
+              <a:xfrm>
+                <a:off x="3659026" y="5638162"/>
+                <a:ext cx="203896" cy="47356"/>
+              </a:xfrm>
+              <a:prstGeom prst="rect">
+                <a:avLst/>
+              </a:prstGeom>
+            </p:spPr>
+            <p:style>
+              <a:lnRef idx="2">
+                <a:schemeClr val="dk1"/>
+              </a:lnRef>
+              <a:fillRef idx="1">
+                <a:schemeClr val="lt1"/>
+              </a:fillRef>
+              <a:effectRef idx="0">
+                <a:schemeClr val="dk1"/>
+              </a:effectRef>
+              <a:fontRef idx="minor">
+                <a:schemeClr val="dk1"/>
+              </a:fontRef>
+            </p:style>
+            <p:txBody>
+              <a:bodyPr rtlCol="0" anchor="ctr"/>
+              <a:lstStyle/>
+              <a:p>
+                <a:pPr algn="ctr"/>
+                <a:endParaRPr lang="en-US"/>
+              </a:p>
+            </p:txBody>
+          </p:sp>
+          <p:sp>
+            <p:nvSpPr>
+              <p:cNvPr id="74" name="Rectangle 73">
+                <a:extLst>
+                  <a:ext uri="{FF2B5EF4-FFF2-40B4-BE49-F238E27FC236}">
+                    <a16:creationId xmlns:a16="http://schemas.microsoft.com/office/drawing/2014/main" id="{16F174E6-A378-7936-DD96-CD446BC9D387}"/>
+                  </a:ext>
+                </a:extLst>
+              </p:cNvPr>
+              <p:cNvSpPr/>
+              <p:nvPr/>
+            </p:nvSpPr>
+            <p:spPr>
+              <a:xfrm>
+                <a:off x="3659026" y="5694674"/>
+                <a:ext cx="203896" cy="47356"/>
+              </a:xfrm>
+              <a:prstGeom prst="rect">
+                <a:avLst/>
+              </a:prstGeom>
+            </p:spPr>
+            <p:style>
+              <a:lnRef idx="2">
+                <a:schemeClr val="dk1"/>
+              </a:lnRef>
+              <a:fillRef idx="1">
+                <a:schemeClr val="lt1"/>
+              </a:fillRef>
+              <a:effectRef idx="0">
+                <a:schemeClr val="dk1"/>
+              </a:effectRef>
+              <a:fontRef idx="minor">
+                <a:schemeClr val="dk1"/>
+              </a:fontRef>
+            </p:style>
+            <p:txBody>
+              <a:bodyPr rtlCol="0" anchor="ctr"/>
+              <a:lstStyle/>
+              <a:p>
+                <a:pPr algn="ctr"/>
+                <a:endParaRPr lang="en-US"/>
+              </a:p>
+            </p:txBody>
+          </p:sp>
+          <p:sp>
+            <p:nvSpPr>
+              <p:cNvPr id="75" name="Rectangle 74">
+                <a:extLst>
+                  <a:ext uri="{FF2B5EF4-FFF2-40B4-BE49-F238E27FC236}">
+                    <a16:creationId xmlns:a16="http://schemas.microsoft.com/office/drawing/2014/main" id="{E96708A7-C688-041A-28F5-A6BB50054286}"/>
+                  </a:ext>
+                </a:extLst>
+              </p:cNvPr>
+              <p:cNvSpPr/>
+              <p:nvPr/>
+            </p:nvSpPr>
+            <p:spPr>
+              <a:xfrm>
+                <a:off x="3659026" y="5751186"/>
+                <a:ext cx="203896" cy="47356"/>
+              </a:xfrm>
+              <a:prstGeom prst="rect">
+                <a:avLst/>
+              </a:prstGeom>
+            </p:spPr>
+            <p:style>
+              <a:lnRef idx="2">
+                <a:schemeClr val="dk1"/>
+              </a:lnRef>
+              <a:fillRef idx="1">
+                <a:schemeClr val="lt1"/>
+              </a:fillRef>
+              <a:effectRef idx="0">
+                <a:schemeClr val="dk1"/>
+              </a:effectRef>
+              <a:fontRef idx="minor">
+                <a:schemeClr val="dk1"/>
+              </a:fontRef>
+            </p:style>
+            <p:txBody>
+              <a:bodyPr rtlCol="0" anchor="ctr"/>
+              <a:lstStyle/>
+              <a:p>
+                <a:pPr algn="ctr"/>
+                <a:endParaRPr lang="en-US"/>
+              </a:p>
+            </p:txBody>
+          </p:sp>
+          <p:sp>
+            <p:nvSpPr>
+              <p:cNvPr id="76" name="Rectangle 75">
+                <a:extLst>
+                  <a:ext uri="{FF2B5EF4-FFF2-40B4-BE49-F238E27FC236}">
+                    <a16:creationId xmlns:a16="http://schemas.microsoft.com/office/drawing/2014/main" id="{539A90D1-5721-89DE-A78E-508B92ED9A46}"/>
+                  </a:ext>
+                </a:extLst>
+              </p:cNvPr>
+              <p:cNvSpPr/>
+              <p:nvPr/>
+            </p:nvSpPr>
+            <p:spPr>
+              <a:xfrm>
+                <a:off x="3659026" y="5816177"/>
+                <a:ext cx="203896" cy="47356"/>
+              </a:xfrm>
+              <a:prstGeom prst="rect">
+                <a:avLst/>
+              </a:prstGeom>
+            </p:spPr>
+            <p:style>
+              <a:lnRef idx="2">
+                <a:schemeClr val="dk1"/>
+              </a:lnRef>
+              <a:fillRef idx="1">
+                <a:schemeClr val="lt1"/>
+              </a:fillRef>
+              <a:effectRef idx="0">
+                <a:schemeClr val="dk1"/>
+              </a:effectRef>
+              <a:fontRef idx="minor">
+                <a:schemeClr val="dk1"/>
+              </a:fontRef>
+            </p:style>
+            <p:txBody>
+              <a:bodyPr rtlCol="0" anchor="ctr"/>
+              <a:lstStyle/>
+              <a:p>
+                <a:pPr algn="ctr"/>
+                <a:endParaRPr lang="en-US"/>
+              </a:p>
+            </p:txBody>
+          </p:sp>
+        </p:grpSp>
+      </p:grpSp>
+      <p:cxnSp>
+        <p:nvCxnSpPr>
+          <p:cNvPr id="77" name="Straight Arrow Connector 76">
+            <a:extLst>
+              <a:ext uri="{FF2B5EF4-FFF2-40B4-BE49-F238E27FC236}">
+                <a16:creationId xmlns:a16="http://schemas.microsoft.com/office/drawing/2014/main" id="{5A8C4165-4833-741C-6096-AEBC827B41B8}"/>
+              </a:ext>
+            </a:extLst>
+          </p:cNvPr>
+          <p:cNvCxnSpPr>
+            <a:cxnSpLocks/>
+            <a:endCxn id="76" idx="2"/>
+          </p:cNvCxnSpPr>
+          <p:nvPr/>
+        </p:nvCxnSpPr>
+        <p:spPr>
+          <a:xfrm flipV="1">
+            <a:off x="5891792" y="2883242"/>
+            <a:ext cx="440727" cy="11961"/>
+          </a:xfrm>
+          <a:prstGeom prst="straightConnector1">
+            <a:avLst/>
+          </a:prstGeom>
+          <a:ln>
+            <a:tailEnd type="triangle"/>
+          </a:ln>
+        </p:spPr>
+        <p:style>
+          <a:lnRef idx="2">
+            <a:schemeClr val="accent1"/>
+          </a:lnRef>
+          <a:fillRef idx="0">
+            <a:schemeClr val="accent1"/>
+          </a:fillRef>
+          <a:effectRef idx="1">
+            <a:schemeClr val="accent1"/>
+          </a:effectRef>
+          <a:fontRef idx="minor">
+            <a:schemeClr val="tx1"/>
+          </a:fontRef>
+        </p:style>
+      </p:cxnSp>
+      <p:cxnSp>
+        <p:nvCxnSpPr>
+          <p:cNvPr id="79" name="Straight Arrow Connector 78">
+            <a:extLst>
+              <a:ext uri="{FF2B5EF4-FFF2-40B4-BE49-F238E27FC236}">
+                <a16:creationId xmlns:a16="http://schemas.microsoft.com/office/drawing/2014/main" id="{8A30CFED-39E1-54CE-831E-39B495FE889A}"/>
+              </a:ext>
+            </a:extLst>
+          </p:cNvPr>
+          <p:cNvCxnSpPr>
+            <a:cxnSpLocks/>
+          </p:cNvCxnSpPr>
+          <p:nvPr/>
+        </p:nvCxnSpPr>
+        <p:spPr>
+          <a:xfrm flipV="1">
+            <a:off x="6567046" y="2553847"/>
+            <a:ext cx="590888" cy="329394"/>
+          </a:xfrm>
+          <a:prstGeom prst="straightConnector1">
+            <a:avLst/>
+          </a:prstGeom>
+          <a:ln>
+            <a:tailEnd type="triangle"/>
+          </a:ln>
+        </p:spPr>
+        <p:style>
+          <a:lnRef idx="2">
+            <a:schemeClr val="accent1"/>
+          </a:lnRef>
+          <a:fillRef idx="0">
+            <a:schemeClr val="accent1"/>
+          </a:fillRef>
+          <a:effectRef idx="1">
+            <a:schemeClr val="accent1"/>
+          </a:effectRef>
+          <a:fontRef idx="minor">
+            <a:schemeClr val="tx1"/>
+          </a:fontRef>
+        </p:style>
+      </p:cxnSp>
+      <p:sp>
+        <p:nvSpPr>
+          <p:cNvPr id="80" name="Rectangle: Rounded Corners 79">
+            <a:extLst>
+              <a:ext uri="{FF2B5EF4-FFF2-40B4-BE49-F238E27FC236}">
+                <a16:creationId xmlns:a16="http://schemas.microsoft.com/office/drawing/2014/main" id="{453B1F28-247E-CFD7-389B-835E9580746C}"/>
+              </a:ext>
+            </a:extLst>
+          </p:cNvPr>
+          <p:cNvSpPr/>
+          <p:nvPr/>
+        </p:nvSpPr>
+        <p:spPr>
+          <a:xfrm>
+            <a:off x="171104" y="2156021"/>
+            <a:ext cx="740588" cy="559220"/>
+          </a:xfrm>
+          <a:prstGeom prst="roundRect">
+            <a:avLst/>
+          </a:prstGeom>
+        </p:spPr>
+        <p:style>
+          <a:lnRef idx="2">
+            <a:schemeClr val="dk1"/>
+          </a:lnRef>
+          <a:fillRef idx="1">
+            <a:schemeClr val="lt1"/>
+          </a:fillRef>
+          <a:effectRef idx="0">
+            <a:schemeClr val="dk1"/>
+          </a:effectRef>
+          <a:fontRef idx="minor">
+            <a:schemeClr val="dk1"/>
+          </a:fontRef>
+        </p:style>
+        <p:txBody>
+          <a:bodyPr rtlCol="0" anchor="ctr"/>
+          <a:lstStyle/>
+          <a:p>
+            <a:pPr algn="ctr"/>
+            <a:r>
+              <a:rPr lang="en-US"/>
+              <a:t>IP6</a:t>
+            </a:r>
+          </a:p>
+        </p:txBody>
+      </p:sp>
+      <p:sp>
+        <p:nvSpPr>
+          <p:cNvPr id="81" name="Rectangle: Rounded Corners 80">
+            <a:extLst>
+              <a:ext uri="{FF2B5EF4-FFF2-40B4-BE49-F238E27FC236}">
+                <a16:creationId xmlns:a16="http://schemas.microsoft.com/office/drawing/2014/main" id="{D15D84F2-43E4-0DF6-4883-41AFAE040BFF}"/>
+              </a:ext>
+            </a:extLst>
+          </p:cNvPr>
+          <p:cNvSpPr/>
+          <p:nvPr/>
+        </p:nvSpPr>
+        <p:spPr>
+          <a:xfrm>
+            <a:off x="5123078" y="2609612"/>
+            <a:ext cx="740588" cy="559220"/>
+          </a:xfrm>
+          <a:prstGeom prst="roundRect">
+            <a:avLst/>
+          </a:prstGeom>
+        </p:spPr>
+        <p:style>
+          <a:lnRef idx="2">
+            <a:schemeClr val="dk1"/>
+          </a:lnRef>
+          <a:fillRef idx="1">
+            <a:schemeClr val="lt1"/>
+          </a:fillRef>
+          <a:effectRef idx="0">
+            <a:schemeClr val="dk1"/>
+          </a:effectRef>
+          <a:fontRef idx="minor">
+            <a:schemeClr val="dk1"/>
+          </a:fontRef>
+        </p:style>
+        <p:txBody>
+          <a:bodyPr rtlCol="0" anchor="ctr"/>
+          <a:lstStyle/>
+          <a:p>
+            <a:pPr algn="ctr"/>
+            <a:r>
+              <a:rPr lang="en-US"/>
+              <a:t>IP0</a:t>
+            </a:r>
+          </a:p>
+        </p:txBody>
+      </p:sp>
+      <p:sp>
+        <p:nvSpPr>
+          <p:cNvPr id="82" name="TextBox 81">
+            <a:extLst>
+              <a:ext uri="{FF2B5EF4-FFF2-40B4-BE49-F238E27FC236}">
+                <a16:creationId xmlns:a16="http://schemas.microsoft.com/office/drawing/2014/main" id="{E0E9B920-AAA3-E3BE-9DCE-6475652A8896}"/>
+              </a:ext>
+            </a:extLst>
+          </p:cNvPr>
+          <p:cNvSpPr txBox="1"/>
+          <p:nvPr/>
+        </p:nvSpPr>
+        <p:spPr>
+          <a:xfrm>
+            <a:off x="1181458" y="2030449"/>
+            <a:ext cx="914400" cy="369332"/>
+          </a:xfrm>
+          <a:prstGeom prst="rect">
+            <a:avLst/>
+          </a:prstGeom>
+          <a:noFill/>
+        </p:spPr>
+        <p:txBody>
+          <a:bodyPr wrap="square" rtlCol="0">
+            <a:spAutoFit/>
+          </a:bodyPr>
+          <a:lstStyle/>
+          <a:p>
+            <a:r>
+              <a:rPr lang="en-IN" b="1">
+                <a:solidFill>
+                  <a:schemeClr val="accent5">
+                    <a:lumMod val="75000"/>
+                  </a:schemeClr>
+                </a:solidFill>
+              </a:rPr>
+              <a:t>1</a:t>
+            </a:r>
+          </a:p>
+        </p:txBody>
+      </p:sp>
+      <p:cxnSp>
+        <p:nvCxnSpPr>
+          <p:cNvPr id="84" name="Straight Arrow Connector 83">
+            <a:extLst>
+              <a:ext uri="{FF2B5EF4-FFF2-40B4-BE49-F238E27FC236}">
+                <a16:creationId xmlns:a16="http://schemas.microsoft.com/office/drawing/2014/main" id="{AA16D7D8-D423-69F6-833D-174C43D2101F}"/>
+              </a:ext>
+            </a:extLst>
+          </p:cNvPr>
+          <p:cNvCxnSpPr>
+            <a:cxnSpLocks/>
+          </p:cNvCxnSpPr>
+          <p:nvPr/>
+        </p:nvCxnSpPr>
+        <p:spPr>
+          <a:xfrm flipV="1">
+            <a:off x="2181722" y="2423669"/>
+            <a:ext cx="440727" cy="11961"/>
+          </a:xfrm>
+          <a:prstGeom prst="straightConnector1">
+            <a:avLst/>
+          </a:prstGeom>
+          <a:ln>
+            <a:tailEnd type="triangle"/>
+          </a:ln>
+        </p:spPr>
+        <p:style>
+          <a:lnRef idx="2">
+            <a:schemeClr val="accent1"/>
+          </a:lnRef>
+          <a:fillRef idx="0">
+            <a:schemeClr val="accent1"/>
+          </a:fillRef>
+          <a:effectRef idx="1">
+            <a:schemeClr val="accent1"/>
+          </a:effectRef>
+          <a:fontRef idx="minor">
+            <a:schemeClr val="tx1"/>
+          </a:fontRef>
+        </p:style>
+      </p:cxnSp>
+      <p:sp>
+        <p:nvSpPr>
+          <p:cNvPr id="85" name="TextBox 84">
+            <a:extLst>
+              <a:ext uri="{FF2B5EF4-FFF2-40B4-BE49-F238E27FC236}">
+                <a16:creationId xmlns:a16="http://schemas.microsoft.com/office/drawing/2014/main" id="{A26F2A29-551F-CE3C-22F6-7908EDEC4F39}"/>
+              </a:ext>
+            </a:extLst>
+          </p:cNvPr>
+          <p:cNvSpPr txBox="1"/>
+          <p:nvPr/>
+        </p:nvSpPr>
+        <p:spPr>
+          <a:xfrm>
+            <a:off x="2258628" y="2486734"/>
+            <a:ext cx="914400" cy="369332"/>
+          </a:xfrm>
+          <a:prstGeom prst="rect">
+            <a:avLst/>
+          </a:prstGeom>
+          <a:noFill/>
+        </p:spPr>
+        <p:txBody>
+          <a:bodyPr wrap="square" rtlCol="0">
+            <a:spAutoFit/>
+          </a:bodyPr>
+          <a:lstStyle/>
+          <a:p>
+            <a:r>
+              <a:rPr lang="en-IN" b="1">
+                <a:solidFill>
+                  <a:schemeClr val="accent5">
+                    <a:lumMod val="75000"/>
+                  </a:schemeClr>
+                </a:solidFill>
+              </a:rPr>
+              <a:t>1 +3</a:t>
+            </a:r>
+          </a:p>
+        </p:txBody>
+      </p:sp>
+      <p:sp>
+        <p:nvSpPr>
+          <p:cNvPr id="86" name="Oval 85">
+            <a:extLst>
+              <a:ext uri="{FF2B5EF4-FFF2-40B4-BE49-F238E27FC236}">
+                <a16:creationId xmlns:a16="http://schemas.microsoft.com/office/drawing/2014/main" id="{5F4D2542-24D8-1214-AA5E-E587556FBED8}"/>
+              </a:ext>
+            </a:extLst>
+          </p:cNvPr>
+          <p:cNvSpPr/>
+          <p:nvPr/>
+        </p:nvSpPr>
+        <p:spPr>
+          <a:xfrm>
+            <a:off x="3821645" y="2399781"/>
+            <a:ext cx="117377" cy="137798"/>
+          </a:xfrm>
+          <a:prstGeom prst="ellipse">
+            <a:avLst/>
+          </a:prstGeom>
+          <a:solidFill>
+            <a:srgbClr val="C00000"/>
+          </a:solidFill>
+        </p:spPr>
+        <p:style>
+          <a:lnRef idx="2">
+            <a:schemeClr val="accent1">
+              <a:shade val="15000"/>
+            </a:schemeClr>
+          </a:lnRef>
+          <a:fillRef idx="1">
+            <a:schemeClr val="accent1"/>
+          </a:fillRef>
+          <a:effectRef idx="0">
+            <a:schemeClr val="accent1"/>
+          </a:effectRef>
+          <a:fontRef idx="minor">
+            <a:schemeClr val="lt1"/>
+          </a:fontRef>
+        </p:style>
+        <p:txBody>
+          <a:bodyPr rtlCol="0" anchor="ctr"/>
+          <a:lstStyle/>
+          <a:p>
+            <a:pPr algn="ctr"/>
+            <a:endParaRPr lang="en-IN"/>
+          </a:p>
+        </p:txBody>
+      </p:sp>
+      <p:cxnSp>
+        <p:nvCxnSpPr>
+          <p:cNvPr id="87" name="Straight Arrow Connector 86">
+            <a:extLst>
+              <a:ext uri="{FF2B5EF4-FFF2-40B4-BE49-F238E27FC236}">
+                <a16:creationId xmlns:a16="http://schemas.microsoft.com/office/drawing/2014/main" id="{E8A3DB24-6056-3394-A027-E40713A253C7}"/>
+              </a:ext>
+            </a:extLst>
+          </p:cNvPr>
+          <p:cNvCxnSpPr>
+            <a:cxnSpLocks/>
+          </p:cNvCxnSpPr>
+          <p:nvPr/>
+        </p:nvCxnSpPr>
+        <p:spPr>
+          <a:xfrm>
+            <a:off x="3518076" y="2448634"/>
+            <a:ext cx="288327" cy="0"/>
+          </a:xfrm>
+          <a:prstGeom prst="straightConnector1">
+            <a:avLst/>
+          </a:prstGeom>
+          <a:ln>
+            <a:tailEnd type="triangle"/>
+          </a:ln>
+        </p:spPr>
+        <p:style>
+          <a:lnRef idx="2">
+            <a:schemeClr val="accent1"/>
+          </a:lnRef>
+          <a:fillRef idx="0">
+            <a:schemeClr val="accent1"/>
+          </a:fillRef>
+          <a:effectRef idx="1">
+            <a:schemeClr val="accent1"/>
+          </a:effectRef>
+          <a:fontRef idx="minor">
+            <a:schemeClr val="tx1"/>
+          </a:fontRef>
+        </p:style>
+      </p:cxnSp>
+      <p:cxnSp>
+        <p:nvCxnSpPr>
+          <p:cNvPr id="89" name="Straight Arrow Connector 88">
+            <a:extLst>
+              <a:ext uri="{FF2B5EF4-FFF2-40B4-BE49-F238E27FC236}">
+                <a16:creationId xmlns:a16="http://schemas.microsoft.com/office/drawing/2014/main" id="{7A44CA28-A265-2D1E-4E9F-88A4C3558402}"/>
+              </a:ext>
+            </a:extLst>
+          </p:cNvPr>
+          <p:cNvCxnSpPr>
+            <a:cxnSpLocks/>
+          </p:cNvCxnSpPr>
+          <p:nvPr/>
+        </p:nvCxnSpPr>
+        <p:spPr>
+          <a:xfrm>
+            <a:off x="3962576" y="2461334"/>
+            <a:ext cx="288327" cy="0"/>
+          </a:xfrm>
+          <a:prstGeom prst="straightConnector1">
+            <a:avLst/>
+          </a:prstGeom>
+          <a:ln>
+            <a:tailEnd type="triangle"/>
+          </a:ln>
+        </p:spPr>
+        <p:style>
+          <a:lnRef idx="2">
+            <a:schemeClr val="accent1"/>
+          </a:lnRef>
+          <a:fillRef idx="0">
+            <a:schemeClr val="accent1"/>
+          </a:fillRef>
+          <a:effectRef idx="1">
+            <a:schemeClr val="accent1"/>
+          </a:effectRef>
+          <a:fontRef idx="minor">
+            <a:schemeClr val="tx1"/>
+          </a:fontRef>
+        </p:style>
+      </p:cxnSp>
+      <p:sp>
+        <p:nvSpPr>
+          <p:cNvPr id="91" name="TextBox 90">
+            <a:extLst>
+              <a:ext uri="{FF2B5EF4-FFF2-40B4-BE49-F238E27FC236}">
+                <a16:creationId xmlns:a16="http://schemas.microsoft.com/office/drawing/2014/main" id="{5B7EBFBA-374A-B756-9C7E-0737A55995D2}"/>
+              </a:ext>
+            </a:extLst>
+          </p:cNvPr>
+          <p:cNvSpPr txBox="1"/>
+          <p:nvPr/>
+        </p:nvSpPr>
+        <p:spPr>
+          <a:xfrm>
+            <a:off x="3641440" y="2548898"/>
+            <a:ext cx="914400" cy="369332"/>
+          </a:xfrm>
+          <a:prstGeom prst="rect">
+            <a:avLst/>
+          </a:prstGeom>
+          <a:noFill/>
+        </p:spPr>
+        <p:txBody>
+          <a:bodyPr wrap="square" rtlCol="0">
+            <a:spAutoFit/>
+          </a:bodyPr>
+          <a:lstStyle/>
+          <a:p>
+            <a:r>
+              <a:rPr lang="en-IN" b="1">
+                <a:solidFill>
+                  <a:schemeClr val="accent5">
+                    <a:lumMod val="75000"/>
+                  </a:schemeClr>
+                </a:solidFill>
+              </a:rPr>
+              <a:t>3+1+3</a:t>
+            </a:r>
+          </a:p>
+        </p:txBody>
+      </p:sp>
+      <p:sp>
+        <p:nvSpPr>
+          <p:cNvPr id="92" name="TextBox 91">
+            <a:extLst>
+              <a:ext uri="{FF2B5EF4-FFF2-40B4-BE49-F238E27FC236}">
+                <a16:creationId xmlns:a16="http://schemas.microsoft.com/office/drawing/2014/main" id="{5F0E9A25-6895-2689-1BA9-C96B97C57627}"/>
+              </a:ext>
+            </a:extLst>
+          </p:cNvPr>
+          <p:cNvSpPr txBox="1"/>
+          <p:nvPr/>
+        </p:nvSpPr>
+        <p:spPr>
+          <a:xfrm>
+            <a:off x="4735536" y="1687351"/>
+            <a:ext cx="1529854" cy="646331"/>
+          </a:xfrm>
+          <a:prstGeom prst="rect">
+            <a:avLst/>
+          </a:prstGeom>
+          <a:noFill/>
+        </p:spPr>
+        <p:txBody>
+          <a:bodyPr wrap="square" rtlCol="0">
+            <a:spAutoFit/>
+          </a:bodyPr>
+          <a:lstStyle/>
+          <a:p>
+            <a:r>
+              <a:rPr lang="en-IN" b="1">
+                <a:solidFill>
+                  <a:schemeClr val="accent5">
+                    <a:lumMod val="75000"/>
+                  </a:schemeClr>
+                </a:solidFill>
+              </a:rPr>
+              <a:t>3+10+1+1+3=18</a:t>
+            </a:r>
+          </a:p>
+        </p:txBody>
+      </p:sp>
+      <p:sp>
+        <p:nvSpPr>
+          <p:cNvPr id="93" name="Oval 92">
+            <a:extLst>
+              <a:ext uri="{FF2B5EF4-FFF2-40B4-BE49-F238E27FC236}">
+                <a16:creationId xmlns:a16="http://schemas.microsoft.com/office/drawing/2014/main" id="{D7C11025-7C0D-69F3-E036-B4C7D04B638A}"/>
+              </a:ext>
+            </a:extLst>
+          </p:cNvPr>
+          <p:cNvSpPr/>
+          <p:nvPr/>
+        </p:nvSpPr>
+        <p:spPr>
+          <a:xfrm>
+            <a:off x="8308152" y="2374381"/>
+            <a:ext cx="117377" cy="137798"/>
+          </a:xfrm>
+          <a:prstGeom prst="ellipse">
+            <a:avLst/>
+          </a:prstGeom>
+          <a:solidFill>
+            <a:srgbClr val="C00000"/>
+          </a:solidFill>
+        </p:spPr>
+        <p:style>
+          <a:lnRef idx="2">
+            <a:schemeClr val="accent1">
+              <a:shade val="15000"/>
+            </a:schemeClr>
+          </a:lnRef>
+          <a:fillRef idx="1">
+            <a:schemeClr val="accent1"/>
+          </a:fillRef>
+          <a:effectRef idx="0">
+            <a:schemeClr val="accent1"/>
+          </a:effectRef>
+          <a:fontRef idx="minor">
+            <a:schemeClr val="lt1"/>
+          </a:fontRef>
+        </p:style>
+        <p:txBody>
+          <a:bodyPr rtlCol="0" anchor="ctr"/>
+          <a:lstStyle/>
+          <a:p>
+            <a:pPr algn="ctr"/>
+            <a:endParaRPr lang="en-IN"/>
+          </a:p>
+        </p:txBody>
+      </p:sp>
+      <p:cxnSp>
+        <p:nvCxnSpPr>
+          <p:cNvPr id="94" name="Straight Arrow Connector 93">
+            <a:extLst>
+              <a:ext uri="{FF2B5EF4-FFF2-40B4-BE49-F238E27FC236}">
+                <a16:creationId xmlns:a16="http://schemas.microsoft.com/office/drawing/2014/main" id="{0DC8B066-A326-C71D-9612-47F6F2B31A69}"/>
+              </a:ext>
+            </a:extLst>
+          </p:cNvPr>
+          <p:cNvCxnSpPr>
+            <a:cxnSpLocks/>
+          </p:cNvCxnSpPr>
+          <p:nvPr/>
+        </p:nvCxnSpPr>
+        <p:spPr>
+          <a:xfrm>
+            <a:off x="8004583" y="2448634"/>
+            <a:ext cx="288327" cy="0"/>
+          </a:xfrm>
+          <a:prstGeom prst="straightConnector1">
+            <a:avLst/>
+          </a:prstGeom>
+          <a:ln>
+            <a:tailEnd type="triangle"/>
+          </a:ln>
+        </p:spPr>
+        <p:style>
+          <a:lnRef idx="2">
+            <a:schemeClr val="accent1"/>
+          </a:lnRef>
+          <a:fillRef idx="0">
+            <a:schemeClr val="accent1"/>
+          </a:fillRef>
+          <a:effectRef idx="1">
+            <a:schemeClr val="accent1"/>
+          </a:effectRef>
+          <a:fontRef idx="minor">
+            <a:schemeClr val="tx1"/>
+          </a:fontRef>
+        </p:style>
+      </p:cxnSp>
+      <p:cxnSp>
+        <p:nvCxnSpPr>
+          <p:cNvPr id="95" name="Straight Arrow Connector 94">
+            <a:extLst>
+              <a:ext uri="{FF2B5EF4-FFF2-40B4-BE49-F238E27FC236}">
+                <a16:creationId xmlns:a16="http://schemas.microsoft.com/office/drawing/2014/main" id="{490B2D80-30F4-CB07-6686-9E34D46CE37A}"/>
+              </a:ext>
+            </a:extLst>
+          </p:cNvPr>
+          <p:cNvCxnSpPr>
+            <a:cxnSpLocks/>
+          </p:cNvCxnSpPr>
+          <p:nvPr/>
+        </p:nvCxnSpPr>
+        <p:spPr>
+          <a:xfrm>
+            <a:off x="8449083" y="2435934"/>
+            <a:ext cx="288327" cy="0"/>
+          </a:xfrm>
+          <a:prstGeom prst="straightConnector1">
+            <a:avLst/>
+          </a:prstGeom>
+          <a:ln>
+            <a:tailEnd type="triangle"/>
+          </a:ln>
+        </p:spPr>
+        <p:style>
+          <a:lnRef idx="2">
+            <a:schemeClr val="accent1"/>
+          </a:lnRef>
+          <a:fillRef idx="0">
+            <a:schemeClr val="accent1"/>
+          </a:fillRef>
+          <a:effectRef idx="1">
+            <a:schemeClr val="accent1"/>
+          </a:effectRef>
+          <a:fontRef idx="minor">
+            <a:schemeClr val="tx1"/>
+          </a:fontRef>
+        </p:style>
+      </p:cxnSp>
+      <p:sp>
+        <p:nvSpPr>
+          <p:cNvPr id="99" name="TextBox 98">
+            <a:extLst>
+              <a:ext uri="{FF2B5EF4-FFF2-40B4-BE49-F238E27FC236}">
+                <a16:creationId xmlns:a16="http://schemas.microsoft.com/office/drawing/2014/main" id="{DC85330B-A825-2329-B773-35A91AE62434}"/>
+              </a:ext>
+            </a:extLst>
+          </p:cNvPr>
+          <p:cNvSpPr txBox="1"/>
+          <p:nvPr/>
+        </p:nvSpPr>
+        <p:spPr>
+          <a:xfrm>
+            <a:off x="9926209" y="2004303"/>
+            <a:ext cx="914400" cy="369332"/>
+          </a:xfrm>
+          <a:prstGeom prst="rect">
+            <a:avLst/>
+          </a:prstGeom>
+          <a:noFill/>
+        </p:spPr>
+        <p:txBody>
+          <a:bodyPr wrap="square" rtlCol="0">
+            <a:spAutoFit/>
+          </a:bodyPr>
+          <a:lstStyle/>
+          <a:p>
+            <a:r>
+              <a:rPr lang="en-IN" b="1">
+                <a:solidFill>
+                  <a:schemeClr val="accent5">
+                    <a:lumMod val="75000"/>
+                  </a:schemeClr>
+                </a:solidFill>
+              </a:rPr>
+              <a:t>22</a:t>
+            </a:r>
+          </a:p>
+        </p:txBody>
+      </p:sp>
+      <p:sp>
+        <p:nvSpPr>
+          <p:cNvPr id="100" name="TextBox 99">
+            <a:extLst>
+              <a:ext uri="{FF2B5EF4-FFF2-40B4-BE49-F238E27FC236}">
+                <a16:creationId xmlns:a16="http://schemas.microsoft.com/office/drawing/2014/main" id="{30D5808F-D186-3B95-1B9E-159A884F0F04}"/>
+              </a:ext>
+            </a:extLst>
+          </p:cNvPr>
+          <p:cNvSpPr txBox="1"/>
+          <p:nvPr/>
+        </p:nvSpPr>
+        <p:spPr>
+          <a:xfrm>
+            <a:off x="5827550" y="2525871"/>
+            <a:ext cx="914400" cy="369332"/>
+          </a:xfrm>
+          <a:prstGeom prst="rect">
+            <a:avLst/>
+          </a:prstGeom>
+          <a:noFill/>
+        </p:spPr>
+        <p:txBody>
+          <a:bodyPr wrap="square" rtlCol="0">
+            <a:spAutoFit/>
+          </a:bodyPr>
+          <a:lstStyle/>
+          <a:p>
+            <a:r>
+              <a:rPr lang="en-IN" b="1">
+                <a:solidFill>
+                  <a:schemeClr val="accent5">
+                    <a:lumMod val="75000"/>
+                  </a:schemeClr>
+                </a:solidFill>
+              </a:rPr>
+              <a:t>1</a:t>
+            </a:r>
+          </a:p>
+        </p:txBody>
+      </p:sp>
+      <p:sp>
+        <p:nvSpPr>
+          <p:cNvPr id="101" name="TextBox 100">
+            <a:extLst>
+              <a:ext uri="{FF2B5EF4-FFF2-40B4-BE49-F238E27FC236}">
+                <a16:creationId xmlns:a16="http://schemas.microsoft.com/office/drawing/2014/main" id="{70FF6DA6-5F96-922C-E136-E71E46D17E18}"/>
+              </a:ext>
+            </a:extLst>
+          </p:cNvPr>
+          <p:cNvSpPr txBox="1"/>
+          <p:nvPr/>
+        </p:nvSpPr>
+        <p:spPr>
+          <a:xfrm>
+            <a:off x="6756268" y="2689960"/>
+            <a:ext cx="914400" cy="369332"/>
+          </a:xfrm>
+          <a:prstGeom prst="rect">
+            <a:avLst/>
+          </a:prstGeom>
+          <a:noFill/>
+        </p:spPr>
+        <p:txBody>
+          <a:bodyPr wrap="square" rtlCol="0">
+            <a:spAutoFit/>
+          </a:bodyPr>
+          <a:lstStyle/>
+          <a:p>
+            <a:r>
+              <a:rPr lang="en-IN" b="1">
+                <a:solidFill>
+                  <a:schemeClr val="accent5">
+                    <a:lumMod val="75000"/>
+                  </a:schemeClr>
+                </a:solidFill>
+              </a:rPr>
+              <a:t>1 +3</a:t>
+            </a:r>
+          </a:p>
+        </p:txBody>
+      </p:sp>
+      <p:sp>
+        <p:nvSpPr>
+          <p:cNvPr id="102" name="TextBox 101">
+            <a:extLst>
+              <a:ext uri="{FF2B5EF4-FFF2-40B4-BE49-F238E27FC236}">
+                <a16:creationId xmlns:a16="http://schemas.microsoft.com/office/drawing/2014/main" id="{837BFCB4-00CD-7435-41CA-C19FFADCAEF9}"/>
+              </a:ext>
+            </a:extLst>
+          </p:cNvPr>
+          <p:cNvSpPr txBox="1"/>
+          <p:nvPr/>
+        </p:nvSpPr>
+        <p:spPr>
+          <a:xfrm>
+            <a:off x="8304184" y="2562407"/>
+            <a:ext cx="914400" cy="369332"/>
+          </a:xfrm>
+          <a:prstGeom prst="rect">
+            <a:avLst/>
+          </a:prstGeom>
+          <a:noFill/>
+        </p:spPr>
+        <p:txBody>
+          <a:bodyPr wrap="square" rtlCol="0">
+            <a:spAutoFit/>
+          </a:bodyPr>
+          <a:lstStyle/>
+          <a:p>
+            <a:r>
+              <a:rPr lang="en-IN" b="1">
+                <a:solidFill>
+                  <a:schemeClr val="accent5">
+                    <a:lumMod val="75000"/>
+                  </a:schemeClr>
+                </a:solidFill>
+              </a:rPr>
+              <a:t>3+1+3</a:t>
+            </a:r>
+          </a:p>
+        </p:txBody>
+      </p:sp>
+    </p:spTree>
+    <p:extLst>
+      <p:ext uri="{BB962C8B-B14F-4D97-AF65-F5344CB8AC3E}">
+        <p14:creationId xmlns:p14="http://schemas.microsoft.com/office/powerpoint/2010/main" val="1785857117"/>
       </p:ext>
     </p:extLst>
   </p:cSld>
